--- a/documents/Form - Design Review Checklist (1 page).pptx
+++ b/documents/Form - Design Review Checklist (1 page).pptx
@@ -6,6 +6,7 @@
   </p:sldMasterIdLst>
   <p:sldIdLst>
     <p:sldId id="256" r:id="rId2"/>
+    <p:sldId id="257" r:id="rId3"/>
   </p:sldIdLst>
   <p:sldSz cx="6858000" cy="9144000" type="letter"/>
   <p:notesSz cx="6858000" cy="9144000"/>
@@ -112,12 +113,20 @@
 </p:presentation>
 </file>
 
+<file path=ppt/revisionInfo.xml><?xml version="1.0" encoding="utf-8"?>
+<p1510:revInfo xmlns:a="http://schemas.openxmlformats.org/drawingml/2006/main" xmlns:r="http://schemas.openxmlformats.org/officeDocument/2006/relationships" xmlns:p1510="http://schemas.microsoft.com/office/powerpoint/2015/10/main">
+  <p1510:revLst>
+    <p1510:client id="{11A97C7F-4150-4802-BF5E-9AB8CBE46CB4}" v="3" dt="2026-03-31T04:45:09.680"/>
+  </p1510:revLst>
+</p1510:revInfo>
+</file>
+
 <file path=ppt/changesInfos/changesInfo1.xml><?xml version="1.0" encoding="utf-8"?>
 <pc:chgInfo xmlns:a="http://schemas.openxmlformats.org/drawingml/2006/main" xmlns:r="http://schemas.openxmlformats.org/officeDocument/2006/relationships" xmlns:ac="http://schemas.microsoft.com/office/drawing/2013/main/command" xmlns:pc="http://schemas.microsoft.com/office/powerpoint/2013/main/command">
   <pc:docChgLst>
     <pc:chgData name="Vaughn Staples" userId="9a5933822faaa4bf" providerId="LiveId" clId="{BB914C8C-BCA1-484B-9A1F-EBF33ADB071F}"/>
-    <pc:docChg chg="delSld">
-      <pc:chgData name="Vaughn Staples" userId="9a5933822faaa4bf" providerId="LiveId" clId="{BB914C8C-BCA1-484B-9A1F-EBF33ADB071F}" dt="2026-03-31T01:18:01.913" v="0" actId="47"/>
+    <pc:docChg chg="custSel addSld delSld modSld">
+      <pc:chgData name="Vaughn Staples" userId="9a5933822faaa4bf" providerId="LiveId" clId="{BB914C8C-BCA1-484B-9A1F-EBF33ADB071F}" dt="2026-03-31T04:45:09.680" v="5"/>
       <pc:docMkLst>
         <pc:docMk/>
       </pc:docMkLst>
@@ -127,6 +136,189 @@
           <pc:docMk/>
           <pc:sldMk cId="1114002744" sldId="257"/>
         </pc:sldMkLst>
+      </pc:sldChg>
+      <pc:sldChg chg="addSp delSp modSp new mod">
+        <pc:chgData name="Vaughn Staples" userId="9a5933822faaa4bf" providerId="LiveId" clId="{BB914C8C-BCA1-484B-9A1F-EBF33ADB071F}" dt="2026-03-31T04:45:09.680" v="5"/>
+        <pc:sldMkLst>
+          <pc:docMk/>
+          <pc:sldMk cId="1409877459" sldId="257"/>
+        </pc:sldMkLst>
+        <pc:spChg chg="del">
+          <ac:chgData name="Vaughn Staples" userId="9a5933822faaa4bf" providerId="LiveId" clId="{BB914C8C-BCA1-484B-9A1F-EBF33ADB071F}" dt="2026-03-31T04:43:27.751" v="2" actId="478"/>
+          <ac:spMkLst>
+            <pc:docMk/>
+            <pc:sldMk cId="1409877459" sldId="257"/>
+            <ac:spMk id="2" creationId="{A4CCC23D-D23A-151E-9B40-AE2A6109E89B}"/>
+          </ac:spMkLst>
+        </pc:spChg>
+        <pc:spChg chg="del">
+          <ac:chgData name="Vaughn Staples" userId="9a5933822faaa4bf" providerId="LiveId" clId="{BB914C8C-BCA1-484B-9A1F-EBF33ADB071F}" dt="2026-03-31T04:43:27.751" v="2" actId="478"/>
+          <ac:spMkLst>
+            <pc:docMk/>
+            <pc:sldMk cId="1409877459" sldId="257"/>
+            <ac:spMk id="3" creationId="{DF9CE6FE-40F0-5C32-C629-0108F73C7AFD}"/>
+          </ac:spMkLst>
+        </pc:spChg>
+        <pc:spChg chg="add mod">
+          <ac:chgData name="Vaughn Staples" userId="9a5933822faaa4bf" providerId="LiveId" clId="{BB914C8C-BCA1-484B-9A1F-EBF33ADB071F}" dt="2026-03-31T04:43:37.454" v="4"/>
+          <ac:spMkLst>
+            <pc:docMk/>
+            <pc:sldMk cId="1409877459" sldId="257"/>
+            <ac:spMk id="26" creationId="{FD0EA45E-4B45-2051-0367-B11BFFC63975}"/>
+          </ac:spMkLst>
+        </pc:spChg>
+        <pc:spChg chg="add mod">
+          <ac:chgData name="Vaughn Staples" userId="9a5933822faaa4bf" providerId="LiveId" clId="{BB914C8C-BCA1-484B-9A1F-EBF33ADB071F}" dt="2026-03-31T04:43:37.454" v="4"/>
+          <ac:spMkLst>
+            <pc:docMk/>
+            <pc:sldMk cId="1409877459" sldId="257"/>
+            <ac:spMk id="27" creationId="{292B4284-02F8-B10F-9F59-10EB0747BF3A}"/>
+          </ac:spMkLst>
+        </pc:spChg>
+        <pc:spChg chg="add mod">
+          <ac:chgData name="Vaughn Staples" userId="9a5933822faaa4bf" providerId="LiveId" clId="{BB914C8C-BCA1-484B-9A1F-EBF33ADB071F}" dt="2026-03-31T04:43:37.454" v="4"/>
+          <ac:spMkLst>
+            <pc:docMk/>
+            <pc:sldMk cId="1409877459" sldId="257"/>
+            <ac:spMk id="28" creationId="{E38F6455-8D19-D8B0-5B93-7A60260FDBD3}"/>
+          </ac:spMkLst>
+        </pc:spChg>
+        <pc:spChg chg="add mod">
+          <ac:chgData name="Vaughn Staples" userId="9a5933822faaa4bf" providerId="LiveId" clId="{BB914C8C-BCA1-484B-9A1F-EBF33ADB071F}" dt="2026-03-31T04:43:37.454" v="4"/>
+          <ac:spMkLst>
+            <pc:docMk/>
+            <pc:sldMk cId="1409877459" sldId="257"/>
+            <ac:spMk id="29" creationId="{44D26195-5792-7756-E39C-C256B3B12528}"/>
+          </ac:spMkLst>
+        </pc:spChg>
+        <pc:spChg chg="add mod">
+          <ac:chgData name="Vaughn Staples" userId="9a5933822faaa4bf" providerId="LiveId" clId="{BB914C8C-BCA1-484B-9A1F-EBF33ADB071F}" dt="2026-03-31T04:43:37.454" v="4"/>
+          <ac:spMkLst>
+            <pc:docMk/>
+            <pc:sldMk cId="1409877459" sldId="257"/>
+            <ac:spMk id="31" creationId="{98240A46-E36A-65FE-6AD6-A25D7A383ECA}"/>
+          </ac:spMkLst>
+        </pc:spChg>
+        <pc:spChg chg="add mod">
+          <ac:chgData name="Vaughn Staples" userId="9a5933822faaa4bf" providerId="LiveId" clId="{BB914C8C-BCA1-484B-9A1F-EBF33ADB071F}" dt="2026-03-31T04:43:37.454" v="4"/>
+          <ac:spMkLst>
+            <pc:docMk/>
+            <pc:sldMk cId="1409877459" sldId="257"/>
+            <ac:spMk id="32" creationId="{78518A19-E7E7-A98A-35B2-232FBF716662}"/>
+          </ac:spMkLst>
+        </pc:spChg>
+        <pc:spChg chg="add mod">
+          <ac:chgData name="Vaughn Staples" userId="9a5933822faaa4bf" providerId="LiveId" clId="{BB914C8C-BCA1-484B-9A1F-EBF33ADB071F}" dt="2026-03-31T04:43:37.454" v="4"/>
+          <ac:spMkLst>
+            <pc:docMk/>
+            <pc:sldMk cId="1409877459" sldId="257"/>
+            <ac:spMk id="33" creationId="{6958883A-E981-D68B-D733-85178C7BC489}"/>
+          </ac:spMkLst>
+        </pc:spChg>
+        <pc:spChg chg="add mod">
+          <ac:chgData name="Vaughn Staples" userId="9a5933822faaa4bf" providerId="LiveId" clId="{BB914C8C-BCA1-484B-9A1F-EBF33ADB071F}" dt="2026-03-31T04:43:37.454" v="4"/>
+          <ac:spMkLst>
+            <pc:docMk/>
+            <pc:sldMk cId="1409877459" sldId="257"/>
+            <ac:spMk id="34" creationId="{4A699FC6-4264-1D6A-6598-26A45283A832}"/>
+          </ac:spMkLst>
+        </pc:spChg>
+        <pc:spChg chg="add mod">
+          <ac:chgData name="Vaughn Staples" userId="9a5933822faaa4bf" providerId="LiveId" clId="{BB914C8C-BCA1-484B-9A1F-EBF33ADB071F}" dt="2026-03-31T04:43:37.454" v="4"/>
+          <ac:spMkLst>
+            <pc:docMk/>
+            <pc:sldMk cId="1409877459" sldId="257"/>
+            <ac:spMk id="35" creationId="{44C9F80B-5009-D8F0-5F8C-3C29AE93DC32}"/>
+          </ac:spMkLst>
+        </pc:spChg>
+        <pc:spChg chg="add mod">
+          <ac:chgData name="Vaughn Staples" userId="9a5933822faaa4bf" providerId="LiveId" clId="{BB914C8C-BCA1-484B-9A1F-EBF33ADB071F}" dt="2026-03-31T04:43:37.454" v="4"/>
+          <ac:spMkLst>
+            <pc:docMk/>
+            <pc:sldMk cId="1409877459" sldId="257"/>
+            <ac:spMk id="36" creationId="{A68DDB6F-9EDE-DE19-61ED-0508AC7F805B}"/>
+          </ac:spMkLst>
+        </pc:spChg>
+        <pc:spChg chg="add mod">
+          <ac:chgData name="Vaughn Staples" userId="9a5933822faaa4bf" providerId="LiveId" clId="{BB914C8C-BCA1-484B-9A1F-EBF33ADB071F}" dt="2026-03-31T04:45:09.680" v="5"/>
+          <ac:spMkLst>
+            <pc:docMk/>
+            <pc:sldMk cId="1409877459" sldId="257"/>
+            <ac:spMk id="59" creationId="{842900B6-3352-F955-ADC2-DD6FF66EB372}"/>
+          </ac:spMkLst>
+        </pc:spChg>
+        <pc:spChg chg="add mod">
+          <ac:chgData name="Vaughn Staples" userId="9a5933822faaa4bf" providerId="LiveId" clId="{BB914C8C-BCA1-484B-9A1F-EBF33ADB071F}" dt="2026-03-31T04:45:09.680" v="5"/>
+          <ac:spMkLst>
+            <pc:docMk/>
+            <pc:sldMk cId="1409877459" sldId="257"/>
+            <ac:spMk id="60" creationId="{58EE4E07-6F1C-C2FB-CCD6-4D462893BEF0}"/>
+          </ac:spMkLst>
+        </pc:spChg>
+        <pc:spChg chg="add mod">
+          <ac:chgData name="Vaughn Staples" userId="9a5933822faaa4bf" providerId="LiveId" clId="{BB914C8C-BCA1-484B-9A1F-EBF33ADB071F}" dt="2026-03-31T04:45:09.680" v="5"/>
+          <ac:spMkLst>
+            <pc:docMk/>
+            <pc:sldMk cId="1409877459" sldId="257"/>
+            <ac:spMk id="61" creationId="{ED0314FC-2DC2-C67A-33AC-B56036072E3E}"/>
+          </ac:spMkLst>
+        </pc:spChg>
+        <pc:spChg chg="add mod">
+          <ac:chgData name="Vaughn Staples" userId="9a5933822faaa4bf" providerId="LiveId" clId="{BB914C8C-BCA1-484B-9A1F-EBF33ADB071F}" dt="2026-03-31T04:45:09.680" v="5"/>
+          <ac:spMkLst>
+            <pc:docMk/>
+            <pc:sldMk cId="1409877459" sldId="257"/>
+            <ac:spMk id="63" creationId="{DFBE1480-CD62-B868-C93F-DDCCD27B457D}"/>
+          </ac:spMkLst>
+        </pc:spChg>
+        <pc:spChg chg="add mod">
+          <ac:chgData name="Vaughn Staples" userId="9a5933822faaa4bf" providerId="LiveId" clId="{BB914C8C-BCA1-484B-9A1F-EBF33ADB071F}" dt="2026-03-31T04:45:09.680" v="5"/>
+          <ac:spMkLst>
+            <pc:docMk/>
+            <pc:sldMk cId="1409877459" sldId="257"/>
+            <ac:spMk id="64" creationId="{329CA520-2C5F-D816-AD33-E69825BE37BA}"/>
+          </ac:spMkLst>
+        </pc:spChg>
+        <pc:spChg chg="add mod">
+          <ac:chgData name="Vaughn Staples" userId="9a5933822faaa4bf" providerId="LiveId" clId="{BB914C8C-BCA1-484B-9A1F-EBF33ADB071F}" dt="2026-03-31T04:45:09.680" v="5"/>
+          <ac:spMkLst>
+            <pc:docMk/>
+            <pc:sldMk cId="1409877459" sldId="257"/>
+            <ac:spMk id="65" creationId="{2E87E7A0-02A1-2BF1-A612-B811726AC12B}"/>
+          </ac:spMkLst>
+        </pc:spChg>
+        <pc:spChg chg="add mod">
+          <ac:chgData name="Vaughn Staples" userId="9a5933822faaa4bf" providerId="LiveId" clId="{BB914C8C-BCA1-484B-9A1F-EBF33ADB071F}" dt="2026-03-31T04:45:09.680" v="5"/>
+          <ac:spMkLst>
+            <pc:docMk/>
+            <pc:sldMk cId="1409877459" sldId="257"/>
+            <ac:spMk id="66" creationId="{589731ED-70F0-E26E-5BCD-DE7E02577CE3}"/>
+          </ac:spMkLst>
+        </pc:spChg>
+        <pc:spChg chg="add mod">
+          <ac:chgData name="Vaughn Staples" userId="9a5933822faaa4bf" providerId="LiveId" clId="{BB914C8C-BCA1-484B-9A1F-EBF33ADB071F}" dt="2026-03-31T04:45:09.680" v="5"/>
+          <ac:spMkLst>
+            <pc:docMk/>
+            <pc:sldMk cId="1409877459" sldId="257"/>
+            <ac:spMk id="67" creationId="{C8C22436-F400-D185-D86B-FDBEAA892FFF}"/>
+          </ac:spMkLst>
+        </pc:spChg>
+        <pc:spChg chg="add mod">
+          <ac:chgData name="Vaughn Staples" userId="9a5933822faaa4bf" providerId="LiveId" clId="{BB914C8C-BCA1-484B-9A1F-EBF33ADB071F}" dt="2026-03-31T04:45:09.680" v="5"/>
+          <ac:spMkLst>
+            <pc:docMk/>
+            <pc:sldMk cId="1409877459" sldId="257"/>
+            <ac:spMk id="69" creationId="{8CCF63C6-0F6D-A4FB-EADF-C4AC68A35455}"/>
+          </ac:spMkLst>
+        </pc:spChg>
+        <pc:spChg chg="add mod">
+          <ac:chgData name="Vaughn Staples" userId="9a5933822faaa4bf" providerId="LiveId" clId="{BB914C8C-BCA1-484B-9A1F-EBF33ADB071F}" dt="2026-03-31T04:45:09.680" v="5"/>
+          <ac:spMkLst>
+            <pc:docMk/>
+            <pc:sldMk cId="1409877459" sldId="257"/>
+            <ac:spMk id="70" creationId="{D8330025-BFB0-A316-4757-32BAA18B4CA3}"/>
+          </ac:spMkLst>
+        </pc:spChg>
       </pc:sldChg>
       <pc:sldChg chg="del">
         <pc:chgData name="Vaughn Staples" userId="9a5933822faaa4bf" providerId="LiveId" clId="{BB914C8C-BCA1-484B-9A1F-EBF33ADB071F}" dt="2026-03-31T01:18:01.913" v="0" actId="47"/>
@@ -3681,6 +3873,2954 @@
 </p:sld>
 </file>
 
+<file path=ppt/slides/slide2.xml><?xml version="1.0" encoding="utf-8"?>
+<p:sld xmlns:a="http://schemas.openxmlformats.org/drawingml/2006/main" xmlns:r="http://schemas.openxmlformats.org/officeDocument/2006/relationships" xmlns:p="http://schemas.openxmlformats.org/presentationml/2006/main">
+  <p:cSld>
+    <p:spTree>
+      <p:nvGrpSpPr>
+        <p:cNvPr id="1" name=""/>
+        <p:cNvGrpSpPr/>
+        <p:nvPr/>
+      </p:nvGrpSpPr>
+      <p:grpSpPr>
+        <a:xfrm>
+          <a:off x="0" y="0"/>
+          <a:ext cx="0" cy="0"/>
+          <a:chOff x="0" y="0"/>
+          <a:chExt cx="0" cy="0"/>
+        </a:xfrm>
+      </p:grpSpPr>
+      <p:cxnSp>
+        <p:nvCxnSpPr>
+          <p:cNvPr id="37" name="Straight Connector 36">
+            <a:extLst>
+              <a:ext uri="{FF2B5EF4-FFF2-40B4-BE49-F238E27FC236}">
+                <a16:creationId xmlns:a16="http://schemas.microsoft.com/office/drawing/2014/main" id="{91FCE763-43BA-9DD0-BE15-9F0B7577EE58}"/>
+              </a:ext>
+            </a:extLst>
+          </p:cNvPr>
+          <p:cNvCxnSpPr/>
+          <p:nvPr/>
+        </p:nvCxnSpPr>
+        <p:spPr>
+          <a:xfrm>
+            <a:off x="826770" y="1826260"/>
+            <a:ext cx="5984875" cy="0"/>
+          </a:xfrm>
+          <a:prstGeom prst="line">
+            <a:avLst/>
+          </a:prstGeom>
+        </p:spPr>
+        <p:style>
+          <a:lnRef idx="2">
+            <a:schemeClr val="dk1"/>
+          </a:lnRef>
+          <a:fillRef idx="0">
+            <a:schemeClr val="dk1"/>
+          </a:fillRef>
+          <a:effectRef idx="1">
+            <a:schemeClr val="dk1"/>
+          </a:effectRef>
+          <a:fontRef idx="minor">
+            <a:schemeClr val="tx1"/>
+          </a:fontRef>
+        </p:style>
+      </p:cxnSp>
+      <p:cxnSp>
+        <p:nvCxnSpPr>
+          <p:cNvPr id="38" name="Straight Connector 37">
+            <a:extLst>
+              <a:ext uri="{FF2B5EF4-FFF2-40B4-BE49-F238E27FC236}">
+                <a16:creationId xmlns:a16="http://schemas.microsoft.com/office/drawing/2014/main" id="{0E345AB6-5824-ECA7-795C-1BDC4AE44956}"/>
+              </a:ext>
+            </a:extLst>
+          </p:cNvPr>
+          <p:cNvCxnSpPr/>
+          <p:nvPr/>
+        </p:nvCxnSpPr>
+        <p:spPr>
+          <a:xfrm>
+            <a:off x="826770" y="2348230"/>
+            <a:ext cx="5984875" cy="0"/>
+          </a:xfrm>
+          <a:prstGeom prst="line">
+            <a:avLst/>
+          </a:prstGeom>
+        </p:spPr>
+        <p:style>
+          <a:lnRef idx="2">
+            <a:schemeClr val="dk1"/>
+          </a:lnRef>
+          <a:fillRef idx="0">
+            <a:schemeClr val="dk1"/>
+          </a:fillRef>
+          <a:effectRef idx="1">
+            <a:schemeClr val="dk1"/>
+          </a:effectRef>
+          <a:fontRef idx="minor">
+            <a:schemeClr val="tx1"/>
+          </a:fontRef>
+        </p:style>
+      </p:cxnSp>
+      <p:cxnSp>
+        <p:nvCxnSpPr>
+          <p:cNvPr id="39" name="Straight Connector 38">
+            <a:extLst>
+              <a:ext uri="{FF2B5EF4-FFF2-40B4-BE49-F238E27FC236}">
+                <a16:creationId xmlns:a16="http://schemas.microsoft.com/office/drawing/2014/main" id="{0F5417E7-6923-6715-DF6E-D32F2474852D}"/>
+              </a:ext>
+            </a:extLst>
+          </p:cNvPr>
+          <p:cNvCxnSpPr/>
+          <p:nvPr/>
+        </p:nvCxnSpPr>
+        <p:spPr>
+          <a:xfrm>
+            <a:off x="826770" y="2870200"/>
+            <a:ext cx="5984875" cy="0"/>
+          </a:xfrm>
+          <a:prstGeom prst="line">
+            <a:avLst/>
+          </a:prstGeom>
+        </p:spPr>
+        <p:style>
+          <a:lnRef idx="2">
+            <a:schemeClr val="dk1"/>
+          </a:lnRef>
+          <a:fillRef idx="0">
+            <a:schemeClr val="dk1"/>
+          </a:fillRef>
+          <a:effectRef idx="1">
+            <a:schemeClr val="dk1"/>
+          </a:effectRef>
+          <a:fontRef idx="minor">
+            <a:schemeClr val="tx1"/>
+          </a:fontRef>
+        </p:style>
+      </p:cxnSp>
+      <p:cxnSp>
+        <p:nvCxnSpPr>
+          <p:cNvPr id="40" name="Straight Connector 39">
+            <a:extLst>
+              <a:ext uri="{FF2B5EF4-FFF2-40B4-BE49-F238E27FC236}">
+                <a16:creationId xmlns:a16="http://schemas.microsoft.com/office/drawing/2014/main" id="{334DC02B-309C-09AF-4A86-B7950A25F915}"/>
+              </a:ext>
+            </a:extLst>
+          </p:cNvPr>
+          <p:cNvCxnSpPr/>
+          <p:nvPr/>
+        </p:nvCxnSpPr>
+        <p:spPr>
+          <a:xfrm>
+            <a:off x="826770" y="3392170"/>
+            <a:ext cx="5984875" cy="0"/>
+          </a:xfrm>
+          <a:prstGeom prst="line">
+            <a:avLst/>
+          </a:prstGeom>
+        </p:spPr>
+        <p:style>
+          <a:lnRef idx="2">
+            <a:schemeClr val="dk1"/>
+          </a:lnRef>
+          <a:fillRef idx="0">
+            <a:schemeClr val="dk1"/>
+          </a:fillRef>
+          <a:effectRef idx="1">
+            <a:schemeClr val="dk1"/>
+          </a:effectRef>
+          <a:fontRef idx="minor">
+            <a:schemeClr val="tx1"/>
+          </a:fontRef>
+        </p:style>
+      </p:cxnSp>
+      <p:cxnSp>
+        <p:nvCxnSpPr>
+          <p:cNvPr id="41" name="Straight Connector 40">
+            <a:extLst>
+              <a:ext uri="{FF2B5EF4-FFF2-40B4-BE49-F238E27FC236}">
+                <a16:creationId xmlns:a16="http://schemas.microsoft.com/office/drawing/2014/main" id="{17EE4FF6-E059-FA73-1F8E-C1C2DB4A46A1}"/>
+              </a:ext>
+            </a:extLst>
+          </p:cNvPr>
+          <p:cNvCxnSpPr/>
+          <p:nvPr/>
+        </p:nvCxnSpPr>
+        <p:spPr>
+          <a:xfrm>
+            <a:off x="826770" y="3819525"/>
+            <a:ext cx="5984875" cy="0"/>
+          </a:xfrm>
+          <a:prstGeom prst="line">
+            <a:avLst/>
+          </a:prstGeom>
+        </p:spPr>
+        <p:style>
+          <a:lnRef idx="2">
+            <a:schemeClr val="dk1"/>
+          </a:lnRef>
+          <a:fillRef idx="0">
+            <a:schemeClr val="dk1"/>
+          </a:fillRef>
+          <a:effectRef idx="1">
+            <a:schemeClr val="dk1"/>
+          </a:effectRef>
+          <a:fontRef idx="minor">
+            <a:schemeClr val="tx1"/>
+          </a:fontRef>
+        </p:style>
+      </p:cxnSp>
+      <p:cxnSp>
+        <p:nvCxnSpPr>
+          <p:cNvPr id="42" name="Straight Connector 41">
+            <a:extLst>
+              <a:ext uri="{FF2B5EF4-FFF2-40B4-BE49-F238E27FC236}">
+                <a16:creationId xmlns:a16="http://schemas.microsoft.com/office/drawing/2014/main" id="{F2715C9C-D8E7-A60A-639B-B1FAA04DF9FA}"/>
+              </a:ext>
+            </a:extLst>
+          </p:cNvPr>
+          <p:cNvCxnSpPr/>
+          <p:nvPr/>
+        </p:nvCxnSpPr>
+        <p:spPr>
+          <a:xfrm>
+            <a:off x="826770" y="4056380"/>
+            <a:ext cx="5984875" cy="0"/>
+          </a:xfrm>
+          <a:prstGeom prst="line">
+            <a:avLst/>
+          </a:prstGeom>
+        </p:spPr>
+        <p:style>
+          <a:lnRef idx="2">
+            <a:schemeClr val="dk1"/>
+          </a:lnRef>
+          <a:fillRef idx="0">
+            <a:schemeClr val="dk1"/>
+          </a:fillRef>
+          <a:effectRef idx="1">
+            <a:schemeClr val="dk1"/>
+          </a:effectRef>
+          <a:fontRef idx="minor">
+            <a:schemeClr val="tx1"/>
+          </a:fontRef>
+        </p:style>
+      </p:cxnSp>
+      <p:cxnSp>
+        <p:nvCxnSpPr>
+          <p:cNvPr id="43" name="Straight Connector 42">
+            <a:extLst>
+              <a:ext uri="{FF2B5EF4-FFF2-40B4-BE49-F238E27FC236}">
+                <a16:creationId xmlns:a16="http://schemas.microsoft.com/office/drawing/2014/main" id="{81C3EF6C-A0DB-E87B-903F-E8A916CE0463}"/>
+              </a:ext>
+            </a:extLst>
+          </p:cNvPr>
+          <p:cNvCxnSpPr/>
+          <p:nvPr/>
+        </p:nvCxnSpPr>
+        <p:spPr>
+          <a:xfrm>
+            <a:off x="838200" y="4636135"/>
+            <a:ext cx="436880" cy="0"/>
+          </a:xfrm>
+          <a:prstGeom prst="line">
+            <a:avLst/>
+          </a:prstGeom>
+        </p:spPr>
+        <p:style>
+          <a:lnRef idx="2">
+            <a:schemeClr val="accent1"/>
+          </a:lnRef>
+          <a:fillRef idx="0">
+            <a:schemeClr val="accent1"/>
+          </a:fillRef>
+          <a:effectRef idx="1">
+            <a:schemeClr val="accent1"/>
+          </a:effectRef>
+          <a:fontRef idx="minor">
+            <a:schemeClr val="tx1"/>
+          </a:fontRef>
+        </p:style>
+      </p:cxnSp>
+      <p:cxnSp>
+        <p:nvCxnSpPr>
+          <p:cNvPr id="44" name="Straight Connector 43">
+            <a:extLst>
+              <a:ext uri="{FF2B5EF4-FFF2-40B4-BE49-F238E27FC236}">
+                <a16:creationId xmlns:a16="http://schemas.microsoft.com/office/drawing/2014/main" id="{DC6808A7-3818-C547-D08B-74AEF5E66D83}"/>
+              </a:ext>
+            </a:extLst>
+          </p:cNvPr>
+          <p:cNvCxnSpPr/>
+          <p:nvPr/>
+        </p:nvCxnSpPr>
+        <p:spPr>
+          <a:xfrm>
+            <a:off x="838200" y="4901565"/>
+            <a:ext cx="436880" cy="0"/>
+          </a:xfrm>
+          <a:prstGeom prst="line">
+            <a:avLst/>
+          </a:prstGeom>
+        </p:spPr>
+        <p:style>
+          <a:lnRef idx="2">
+            <a:schemeClr val="accent1"/>
+          </a:lnRef>
+          <a:fillRef idx="0">
+            <a:schemeClr val="accent1"/>
+          </a:fillRef>
+          <a:effectRef idx="1">
+            <a:schemeClr val="accent1"/>
+          </a:effectRef>
+          <a:fontRef idx="minor">
+            <a:schemeClr val="tx1"/>
+          </a:fontRef>
+        </p:style>
+      </p:cxnSp>
+      <p:cxnSp>
+        <p:nvCxnSpPr>
+          <p:cNvPr id="45" name="Straight Connector 44">
+            <a:extLst>
+              <a:ext uri="{FF2B5EF4-FFF2-40B4-BE49-F238E27FC236}">
+                <a16:creationId xmlns:a16="http://schemas.microsoft.com/office/drawing/2014/main" id="{875CD2F4-1070-DE17-3D8F-737D69D0A815}"/>
+              </a:ext>
+            </a:extLst>
+          </p:cNvPr>
+          <p:cNvCxnSpPr/>
+          <p:nvPr/>
+        </p:nvCxnSpPr>
+        <p:spPr>
+          <a:xfrm>
+            <a:off x="838200" y="5114925"/>
+            <a:ext cx="436880" cy="0"/>
+          </a:xfrm>
+          <a:prstGeom prst="line">
+            <a:avLst/>
+          </a:prstGeom>
+        </p:spPr>
+        <p:style>
+          <a:lnRef idx="2">
+            <a:schemeClr val="accent1"/>
+          </a:lnRef>
+          <a:fillRef idx="0">
+            <a:schemeClr val="accent1"/>
+          </a:fillRef>
+          <a:effectRef idx="1">
+            <a:schemeClr val="accent1"/>
+          </a:effectRef>
+          <a:fontRef idx="minor">
+            <a:schemeClr val="tx1"/>
+          </a:fontRef>
+        </p:style>
+      </p:cxnSp>
+      <p:cxnSp>
+        <p:nvCxnSpPr>
+          <p:cNvPr id="46" name="Straight Connector 45">
+            <a:extLst>
+              <a:ext uri="{FF2B5EF4-FFF2-40B4-BE49-F238E27FC236}">
+                <a16:creationId xmlns:a16="http://schemas.microsoft.com/office/drawing/2014/main" id="{5E4448CD-42E4-E79C-9598-974A5298369D}"/>
+              </a:ext>
+            </a:extLst>
+          </p:cNvPr>
+          <p:cNvCxnSpPr/>
+          <p:nvPr/>
+        </p:nvCxnSpPr>
+        <p:spPr>
+          <a:xfrm>
+            <a:off x="838200" y="5310505"/>
+            <a:ext cx="436880" cy="0"/>
+          </a:xfrm>
+          <a:prstGeom prst="line">
+            <a:avLst/>
+          </a:prstGeom>
+        </p:spPr>
+        <p:style>
+          <a:lnRef idx="2">
+            <a:schemeClr val="accent1"/>
+          </a:lnRef>
+          <a:fillRef idx="0">
+            <a:schemeClr val="accent1"/>
+          </a:fillRef>
+          <a:effectRef idx="1">
+            <a:schemeClr val="accent1"/>
+          </a:effectRef>
+          <a:fontRef idx="minor">
+            <a:schemeClr val="tx1"/>
+          </a:fontRef>
+        </p:style>
+      </p:cxnSp>
+      <p:cxnSp>
+        <p:nvCxnSpPr>
+          <p:cNvPr id="47" name="Straight Connector 46">
+            <a:extLst>
+              <a:ext uri="{FF2B5EF4-FFF2-40B4-BE49-F238E27FC236}">
+                <a16:creationId xmlns:a16="http://schemas.microsoft.com/office/drawing/2014/main" id="{FAA1FEDD-4F51-B93B-C283-31029F4BC5A5}"/>
+              </a:ext>
+            </a:extLst>
+          </p:cNvPr>
+          <p:cNvCxnSpPr/>
+          <p:nvPr/>
+        </p:nvCxnSpPr>
+        <p:spPr>
+          <a:xfrm>
+            <a:off x="838200" y="5582920"/>
+            <a:ext cx="436880" cy="0"/>
+          </a:xfrm>
+          <a:prstGeom prst="line">
+            <a:avLst/>
+          </a:prstGeom>
+        </p:spPr>
+        <p:style>
+          <a:lnRef idx="2">
+            <a:schemeClr val="accent1"/>
+          </a:lnRef>
+          <a:fillRef idx="0">
+            <a:schemeClr val="accent1"/>
+          </a:fillRef>
+          <a:effectRef idx="1">
+            <a:schemeClr val="accent1"/>
+          </a:effectRef>
+          <a:fontRef idx="minor">
+            <a:schemeClr val="tx1"/>
+          </a:fontRef>
+        </p:style>
+      </p:cxnSp>
+      <p:cxnSp>
+        <p:nvCxnSpPr>
+          <p:cNvPr id="48" name="Straight Connector 47">
+            <a:extLst>
+              <a:ext uri="{FF2B5EF4-FFF2-40B4-BE49-F238E27FC236}">
+                <a16:creationId xmlns:a16="http://schemas.microsoft.com/office/drawing/2014/main" id="{6FDB61F0-1EA1-6A75-94B5-7619160AEBC8}"/>
+              </a:ext>
+            </a:extLst>
+          </p:cNvPr>
+          <p:cNvCxnSpPr/>
+          <p:nvPr/>
+        </p:nvCxnSpPr>
+        <p:spPr>
+          <a:xfrm>
+            <a:off x="838200" y="5855970"/>
+            <a:ext cx="436880" cy="0"/>
+          </a:xfrm>
+          <a:prstGeom prst="line">
+            <a:avLst/>
+          </a:prstGeom>
+        </p:spPr>
+        <p:style>
+          <a:lnRef idx="2">
+            <a:schemeClr val="accent1"/>
+          </a:lnRef>
+          <a:fillRef idx="0">
+            <a:schemeClr val="accent1"/>
+          </a:fillRef>
+          <a:effectRef idx="1">
+            <a:schemeClr val="accent1"/>
+          </a:effectRef>
+          <a:fontRef idx="minor">
+            <a:schemeClr val="tx1"/>
+          </a:fontRef>
+        </p:style>
+      </p:cxnSp>
+      <p:cxnSp>
+        <p:nvCxnSpPr>
+          <p:cNvPr id="49" name="Straight Connector 48">
+            <a:extLst>
+              <a:ext uri="{FF2B5EF4-FFF2-40B4-BE49-F238E27FC236}">
+                <a16:creationId xmlns:a16="http://schemas.microsoft.com/office/drawing/2014/main" id="{753171EC-D80A-13BE-EAF1-CFFCD9703BED}"/>
+              </a:ext>
+            </a:extLst>
+          </p:cNvPr>
+          <p:cNvCxnSpPr/>
+          <p:nvPr/>
+        </p:nvCxnSpPr>
+        <p:spPr>
+          <a:xfrm>
+            <a:off x="838200" y="6122670"/>
+            <a:ext cx="436880" cy="0"/>
+          </a:xfrm>
+          <a:prstGeom prst="line">
+            <a:avLst/>
+          </a:prstGeom>
+        </p:spPr>
+        <p:style>
+          <a:lnRef idx="2">
+            <a:schemeClr val="accent1"/>
+          </a:lnRef>
+          <a:fillRef idx="0">
+            <a:schemeClr val="accent1"/>
+          </a:fillRef>
+          <a:effectRef idx="1">
+            <a:schemeClr val="accent1"/>
+          </a:effectRef>
+          <a:fontRef idx="minor">
+            <a:schemeClr val="tx1"/>
+          </a:fontRef>
+        </p:style>
+      </p:cxnSp>
+      <p:cxnSp>
+        <p:nvCxnSpPr>
+          <p:cNvPr id="50" name="Straight Connector 49">
+            <a:extLst>
+              <a:ext uri="{FF2B5EF4-FFF2-40B4-BE49-F238E27FC236}">
+                <a16:creationId xmlns:a16="http://schemas.microsoft.com/office/drawing/2014/main" id="{E3A68E22-2F6A-5352-EF1D-B50E59F0957A}"/>
+              </a:ext>
+            </a:extLst>
+          </p:cNvPr>
+          <p:cNvCxnSpPr/>
+          <p:nvPr/>
+        </p:nvCxnSpPr>
+        <p:spPr>
+          <a:xfrm>
+            <a:off x="838200" y="6401435"/>
+            <a:ext cx="436880" cy="0"/>
+          </a:xfrm>
+          <a:prstGeom prst="line">
+            <a:avLst/>
+          </a:prstGeom>
+        </p:spPr>
+        <p:style>
+          <a:lnRef idx="2">
+            <a:schemeClr val="accent1"/>
+          </a:lnRef>
+          <a:fillRef idx="0">
+            <a:schemeClr val="accent1"/>
+          </a:fillRef>
+          <a:effectRef idx="1">
+            <a:schemeClr val="accent1"/>
+          </a:effectRef>
+          <a:fontRef idx="minor">
+            <a:schemeClr val="tx1"/>
+          </a:fontRef>
+        </p:style>
+      </p:cxnSp>
+      <p:cxnSp>
+        <p:nvCxnSpPr>
+          <p:cNvPr id="51" name="Straight Connector 50">
+            <a:extLst>
+              <a:ext uri="{FF2B5EF4-FFF2-40B4-BE49-F238E27FC236}">
+                <a16:creationId xmlns:a16="http://schemas.microsoft.com/office/drawing/2014/main" id="{DFF53998-7D4C-91E6-C04F-ABE501C7E088}"/>
+              </a:ext>
+            </a:extLst>
+          </p:cNvPr>
+          <p:cNvCxnSpPr/>
+          <p:nvPr/>
+        </p:nvCxnSpPr>
+        <p:spPr>
+          <a:xfrm>
+            <a:off x="838200" y="6674485"/>
+            <a:ext cx="436880" cy="0"/>
+          </a:xfrm>
+          <a:prstGeom prst="line">
+            <a:avLst/>
+          </a:prstGeom>
+        </p:spPr>
+        <p:style>
+          <a:lnRef idx="2">
+            <a:schemeClr val="accent1"/>
+          </a:lnRef>
+          <a:fillRef idx="0">
+            <a:schemeClr val="accent1"/>
+          </a:fillRef>
+          <a:effectRef idx="1">
+            <a:schemeClr val="accent1"/>
+          </a:effectRef>
+          <a:fontRef idx="minor">
+            <a:schemeClr val="tx1"/>
+          </a:fontRef>
+        </p:style>
+      </p:cxnSp>
+      <p:cxnSp>
+        <p:nvCxnSpPr>
+          <p:cNvPr id="52" name="Straight Connector 51">
+            <a:extLst>
+              <a:ext uri="{FF2B5EF4-FFF2-40B4-BE49-F238E27FC236}">
+                <a16:creationId xmlns:a16="http://schemas.microsoft.com/office/drawing/2014/main" id="{61E7E127-2FCB-0DA3-47A1-B9F0D51864EF}"/>
+              </a:ext>
+            </a:extLst>
+          </p:cNvPr>
+          <p:cNvCxnSpPr/>
+          <p:nvPr/>
+        </p:nvCxnSpPr>
+        <p:spPr>
+          <a:xfrm>
+            <a:off x="993140" y="6824345"/>
+            <a:ext cx="436880" cy="0"/>
+          </a:xfrm>
+          <a:prstGeom prst="line">
+            <a:avLst/>
+          </a:prstGeom>
+        </p:spPr>
+        <p:style>
+          <a:lnRef idx="2">
+            <a:schemeClr val="accent1"/>
+          </a:lnRef>
+          <a:fillRef idx="0">
+            <a:schemeClr val="accent1"/>
+          </a:fillRef>
+          <a:effectRef idx="1">
+            <a:schemeClr val="accent1"/>
+          </a:effectRef>
+          <a:fontRef idx="minor">
+            <a:schemeClr val="tx1"/>
+          </a:fontRef>
+        </p:style>
+      </p:cxnSp>
+      <p:cxnSp>
+        <p:nvCxnSpPr>
+          <p:cNvPr id="53" name="Straight Connector 52">
+            <a:extLst>
+              <a:ext uri="{FF2B5EF4-FFF2-40B4-BE49-F238E27FC236}">
+                <a16:creationId xmlns:a16="http://schemas.microsoft.com/office/drawing/2014/main" id="{12FEBE3A-B39E-2B7B-BBC2-C90EFD540293}"/>
+              </a:ext>
+            </a:extLst>
+          </p:cNvPr>
+          <p:cNvCxnSpPr/>
+          <p:nvPr/>
+        </p:nvCxnSpPr>
+        <p:spPr>
+          <a:xfrm>
+            <a:off x="1147445" y="6978650"/>
+            <a:ext cx="436880" cy="0"/>
+          </a:xfrm>
+          <a:prstGeom prst="line">
+            <a:avLst/>
+          </a:prstGeom>
+        </p:spPr>
+        <p:style>
+          <a:lnRef idx="2">
+            <a:schemeClr val="accent1"/>
+          </a:lnRef>
+          <a:fillRef idx="0">
+            <a:schemeClr val="accent1"/>
+          </a:fillRef>
+          <a:effectRef idx="1">
+            <a:schemeClr val="accent1"/>
+          </a:effectRef>
+          <a:fontRef idx="minor">
+            <a:schemeClr val="tx1"/>
+          </a:fontRef>
+        </p:style>
+      </p:cxnSp>
+      <p:cxnSp>
+        <p:nvCxnSpPr>
+          <p:cNvPr id="54" name="Straight Connector 53">
+            <a:extLst>
+              <a:ext uri="{FF2B5EF4-FFF2-40B4-BE49-F238E27FC236}">
+                <a16:creationId xmlns:a16="http://schemas.microsoft.com/office/drawing/2014/main" id="{9547D806-2BCB-6A28-B7E2-674A9A048BC3}"/>
+              </a:ext>
+            </a:extLst>
+          </p:cNvPr>
+          <p:cNvCxnSpPr/>
+          <p:nvPr/>
+        </p:nvCxnSpPr>
+        <p:spPr>
+          <a:xfrm>
+            <a:off x="1301750" y="7132955"/>
+            <a:ext cx="436880" cy="0"/>
+          </a:xfrm>
+          <a:prstGeom prst="line">
+            <a:avLst/>
+          </a:prstGeom>
+        </p:spPr>
+        <p:style>
+          <a:lnRef idx="2">
+            <a:schemeClr val="accent1"/>
+          </a:lnRef>
+          <a:fillRef idx="0">
+            <a:schemeClr val="accent1"/>
+          </a:fillRef>
+          <a:effectRef idx="1">
+            <a:schemeClr val="accent1"/>
+          </a:effectRef>
+          <a:fontRef idx="minor">
+            <a:schemeClr val="tx1"/>
+          </a:fontRef>
+        </p:style>
+      </p:cxnSp>
+      <p:cxnSp>
+        <p:nvCxnSpPr>
+          <p:cNvPr id="55" name="Straight Connector 54">
+            <a:extLst>
+              <a:ext uri="{FF2B5EF4-FFF2-40B4-BE49-F238E27FC236}">
+                <a16:creationId xmlns:a16="http://schemas.microsoft.com/office/drawing/2014/main" id="{9CCC2B3D-7412-077B-C2CF-75F12F7D8430}"/>
+              </a:ext>
+            </a:extLst>
+          </p:cNvPr>
+          <p:cNvCxnSpPr/>
+          <p:nvPr/>
+        </p:nvCxnSpPr>
+        <p:spPr>
+          <a:xfrm>
+            <a:off x="1456690" y="7287260"/>
+            <a:ext cx="436880" cy="0"/>
+          </a:xfrm>
+          <a:prstGeom prst="line">
+            <a:avLst/>
+          </a:prstGeom>
+        </p:spPr>
+        <p:style>
+          <a:lnRef idx="2">
+            <a:schemeClr val="accent1"/>
+          </a:lnRef>
+          <a:fillRef idx="0">
+            <a:schemeClr val="accent1"/>
+          </a:fillRef>
+          <a:effectRef idx="1">
+            <a:schemeClr val="accent1"/>
+          </a:effectRef>
+          <a:fontRef idx="minor">
+            <a:schemeClr val="tx1"/>
+          </a:fontRef>
+        </p:style>
+      </p:cxnSp>
+      <p:cxnSp>
+        <p:nvCxnSpPr>
+          <p:cNvPr id="56" name="Straight Connector 55">
+            <a:extLst>
+              <a:ext uri="{FF2B5EF4-FFF2-40B4-BE49-F238E27FC236}">
+                <a16:creationId xmlns:a16="http://schemas.microsoft.com/office/drawing/2014/main" id="{A940D7D9-834F-1A11-AF47-25DC92B57345}"/>
+              </a:ext>
+            </a:extLst>
+          </p:cNvPr>
+          <p:cNvCxnSpPr/>
+          <p:nvPr/>
+        </p:nvCxnSpPr>
+        <p:spPr>
+          <a:xfrm>
+            <a:off x="1610995" y="7441565"/>
+            <a:ext cx="436880" cy="0"/>
+          </a:xfrm>
+          <a:prstGeom prst="line">
+            <a:avLst/>
+          </a:prstGeom>
+        </p:spPr>
+        <p:style>
+          <a:lnRef idx="2">
+            <a:schemeClr val="accent1"/>
+          </a:lnRef>
+          <a:fillRef idx="0">
+            <a:schemeClr val="accent1"/>
+          </a:fillRef>
+          <a:effectRef idx="1">
+            <a:schemeClr val="accent1"/>
+          </a:effectRef>
+          <a:fontRef idx="minor">
+            <a:schemeClr val="tx1"/>
+          </a:fontRef>
+        </p:style>
+      </p:cxnSp>
+      <p:cxnSp>
+        <p:nvCxnSpPr>
+          <p:cNvPr id="57" name="Straight Connector 56">
+            <a:extLst>
+              <a:ext uri="{FF2B5EF4-FFF2-40B4-BE49-F238E27FC236}">
+                <a16:creationId xmlns:a16="http://schemas.microsoft.com/office/drawing/2014/main" id="{EA939435-C872-6FF5-03F7-268880B2025A}"/>
+              </a:ext>
+            </a:extLst>
+          </p:cNvPr>
+          <p:cNvCxnSpPr/>
+          <p:nvPr/>
+        </p:nvCxnSpPr>
+        <p:spPr>
+          <a:xfrm>
+            <a:off x="1765300" y="7595870"/>
+            <a:ext cx="436880" cy="0"/>
+          </a:xfrm>
+          <a:prstGeom prst="line">
+            <a:avLst/>
+          </a:prstGeom>
+        </p:spPr>
+        <p:style>
+          <a:lnRef idx="2">
+            <a:schemeClr val="accent1"/>
+          </a:lnRef>
+          <a:fillRef idx="0">
+            <a:schemeClr val="accent1"/>
+          </a:fillRef>
+          <a:effectRef idx="1">
+            <a:schemeClr val="accent1"/>
+          </a:effectRef>
+          <a:fontRef idx="minor">
+            <a:schemeClr val="tx1"/>
+          </a:fontRef>
+        </p:style>
+      </p:cxnSp>
+      <p:cxnSp>
+        <p:nvCxnSpPr>
+          <p:cNvPr id="58" name="Straight Connector 57">
+            <a:extLst>
+              <a:ext uri="{FF2B5EF4-FFF2-40B4-BE49-F238E27FC236}">
+                <a16:creationId xmlns:a16="http://schemas.microsoft.com/office/drawing/2014/main" id="{06128BA9-E962-5AB6-DA82-532263A6333A}"/>
+              </a:ext>
+            </a:extLst>
+          </p:cNvPr>
+          <p:cNvCxnSpPr/>
+          <p:nvPr/>
+        </p:nvCxnSpPr>
+        <p:spPr>
+          <a:xfrm>
+            <a:off x="838200" y="8728075"/>
+            <a:ext cx="436880" cy="0"/>
+          </a:xfrm>
+          <a:prstGeom prst="line">
+            <a:avLst/>
+          </a:prstGeom>
+        </p:spPr>
+        <p:style>
+          <a:lnRef idx="2">
+            <a:schemeClr val="accent1"/>
+          </a:lnRef>
+          <a:fillRef idx="0">
+            <a:schemeClr val="accent1"/>
+          </a:fillRef>
+          <a:effectRef idx="1">
+            <a:schemeClr val="accent1"/>
+          </a:effectRef>
+          <a:fontRef idx="minor">
+            <a:schemeClr val="tx1"/>
+          </a:fontRef>
+        </p:style>
+      </p:cxnSp>
+      <p:sp>
+        <p:nvSpPr>
+          <p:cNvPr id="59" name="Rectangle 56">
+            <a:extLst>
+              <a:ext uri="{FF2B5EF4-FFF2-40B4-BE49-F238E27FC236}">
+                <a16:creationId xmlns:a16="http://schemas.microsoft.com/office/drawing/2014/main" id="{842900B6-3352-F955-ADC2-DD6FF66EB372}"/>
+              </a:ext>
+            </a:extLst>
+          </p:cNvPr>
+          <p:cNvSpPr>
+            <a:spLocks noChangeArrowheads="1"/>
+          </p:cNvSpPr>
+          <p:nvPr/>
+        </p:nvSpPr>
+        <p:spPr bwMode="auto">
+          <a:xfrm>
+            <a:off x="152400" y="152400"/>
+            <a:ext cx="6858000" cy="457200"/>
+          </a:xfrm>
+          <a:prstGeom prst="rect">
+            <a:avLst/>
+          </a:prstGeom>
+          <a:noFill/>
+          <a:ln>
+            <a:noFill/>
+          </a:ln>
+          <a:effectLst/>
+          <a:extLst>
+            <a:ext uri="{909E8E84-426E-40DD-AFC4-6F175D3DCCD1}">
+              <a14:hiddenFill xmlns:a14="http://schemas.microsoft.com/office/drawing/2010/main">
+                <a:solidFill>
+                  <a:schemeClr val="accent1"/>
+                </a:solidFill>
+              </a14:hiddenFill>
+            </a:ext>
+            <a:ext uri="{91240B29-F687-4F45-9708-019B960494DF}">
+              <a14:hiddenLine xmlns:a14="http://schemas.microsoft.com/office/drawing/2010/main" w="9525">
+                <a:solidFill>
+                  <a:schemeClr val="tx1"/>
+                </a:solidFill>
+                <a:miter lim="800000"/>
+                <a:headEnd/>
+                <a:tailEnd/>
+              </a14:hiddenLine>
+            </a:ext>
+            <a:ext uri="{AF507438-7753-43E0-B8FC-AC1667EBCBE1}">
+              <a14:hiddenEffects xmlns:a14="http://schemas.microsoft.com/office/drawing/2010/main">
+                <a:effectLst>
+                  <a:outerShdw dist="35921" dir="2700000" algn="ctr" rotWithShape="0">
+                    <a:schemeClr val="bg2"/>
+                  </a:outerShdw>
+                </a:effectLst>
+              </a14:hiddenEffects>
+            </a:ext>
+          </a:extLst>
+        </p:spPr>
+        <p:txBody>
+          <a:bodyPr vert="horz" wrap="none" lIns="91440" tIns="45720" rIns="91440" bIns="45720" numCol="1" anchor="ctr" anchorCtr="0" compatLnSpc="1">
+            <a:prstTxWarp prst="textNoShape">
+              <a:avLst/>
+            </a:prstTxWarp>
+            <a:spAutoFit/>
+          </a:bodyPr>
+          <a:lstStyle/>
+          <a:p>
+            <a:pPr marL="0" marR="0" lvl="0" indent="0" algn="l" defTabSz="914400" rtl="0" eaLnBrk="0" fontAlgn="base" latinLnBrk="0" hangingPunct="0">
+              <a:lnSpc>
+                <a:spcPct val="100000"/>
+              </a:lnSpc>
+              <a:spcBef>
+                <a:spcPct val="0"/>
+              </a:spcBef>
+              <a:spcAft>
+                <a:spcPct val="0"/>
+              </a:spcAft>
+              <a:buClrTx/>
+              <a:buSzTx/>
+              <a:buFontTx/>
+              <a:buNone/>
+              <a:tabLst/>
+            </a:pPr>
+            <a:r>
+              <a:rPr kumimoji="0" lang="en-US" altLang="en-US" sz="1600" b="1" i="0" u="none" strike="noStrike" cap="none" normalizeH="0" baseline="0">
+                <a:ln>
+                  <a:noFill/>
+                </a:ln>
+                <a:solidFill>
+                  <a:schemeClr val="tx1"/>
+                </a:solidFill>
+                <a:effectLst/>
+                <a:latin typeface="Aptos" panose="020B0004020202020204" pitchFamily="34" charset="0"/>
+                <a:ea typeface="DengXian" panose="02010600030101010101" pitchFamily="2" charset="-122"/>
+                <a:cs typeface="Times New Roman" panose="02020603050405020304" pitchFamily="18" charset="0"/>
+              </a:rPr>
+              <a:t>PCB DESIGN REVIEW CHECKLIST</a:t>
+            </a:r>
+            <a:endParaRPr kumimoji="0" lang="en-US" altLang="en-US" sz="400" b="0" i="0" u="none" strike="noStrike" cap="none" normalizeH="0" baseline="0">
+              <a:ln>
+                <a:noFill/>
+              </a:ln>
+              <a:solidFill>
+                <a:schemeClr val="tx1"/>
+              </a:solidFill>
+              <a:effectLst/>
+            </a:endParaRPr>
+          </a:p>
+          <a:p>
+            <a:pPr marL="0" marR="0" lvl="0" indent="0" algn="l" defTabSz="914400" rtl="0" eaLnBrk="0" fontAlgn="base" latinLnBrk="0" hangingPunct="0">
+              <a:lnSpc>
+                <a:spcPct val="100000"/>
+              </a:lnSpc>
+              <a:spcBef>
+                <a:spcPct val="0"/>
+              </a:spcBef>
+              <a:spcAft>
+                <a:spcPct val="0"/>
+              </a:spcAft>
+              <a:buClrTx/>
+              <a:buSzTx/>
+              <a:buFontTx/>
+              <a:buNone/>
+              <a:tabLst/>
+            </a:pPr>
+            <a:endParaRPr kumimoji="0" lang="en-US" altLang="en-US" sz="1800" b="0" i="0" u="none" strike="noStrike" cap="none" normalizeH="0" baseline="0">
+              <a:ln>
+                <a:noFill/>
+              </a:ln>
+              <a:solidFill>
+                <a:schemeClr val="tx1"/>
+              </a:solidFill>
+              <a:effectLst/>
+              <a:latin typeface="Arial" panose="020B0604020202020204" pitchFamily="34" charset="0"/>
+            </a:endParaRPr>
+          </a:p>
+        </p:txBody>
+      </p:sp>
+      <p:sp>
+        <p:nvSpPr>
+          <p:cNvPr id="60" name="Rectangle 57">
+            <a:extLst>
+              <a:ext uri="{FF2B5EF4-FFF2-40B4-BE49-F238E27FC236}">
+                <a16:creationId xmlns:a16="http://schemas.microsoft.com/office/drawing/2014/main" id="{58EE4E07-6F1C-C2FB-CCD6-4D462893BEF0}"/>
+              </a:ext>
+            </a:extLst>
+          </p:cNvPr>
+          <p:cNvSpPr>
+            <a:spLocks noChangeArrowheads="1"/>
+          </p:cNvSpPr>
+          <p:nvPr/>
+        </p:nvSpPr>
+        <p:spPr bwMode="auto">
+          <a:xfrm>
+            <a:off x="152400" y="609600"/>
+            <a:ext cx="6858000" cy="0"/>
+          </a:xfrm>
+          <a:prstGeom prst="rect">
+            <a:avLst/>
+          </a:prstGeom>
+          <a:noFill/>
+          <a:ln>
+            <a:noFill/>
+          </a:ln>
+          <a:effectLst/>
+          <a:extLst>
+            <a:ext uri="{909E8E84-426E-40DD-AFC4-6F175D3DCCD1}">
+              <a14:hiddenFill xmlns:a14="http://schemas.microsoft.com/office/drawing/2010/main">
+                <a:solidFill>
+                  <a:schemeClr val="accent1"/>
+                </a:solidFill>
+              </a14:hiddenFill>
+            </a:ext>
+            <a:ext uri="{91240B29-F687-4F45-9708-019B960494DF}">
+              <a14:hiddenLine xmlns:a14="http://schemas.microsoft.com/office/drawing/2010/main" w="9525">
+                <a:solidFill>
+                  <a:schemeClr val="tx1"/>
+                </a:solidFill>
+                <a:miter lim="800000"/>
+                <a:headEnd/>
+                <a:tailEnd/>
+              </a14:hiddenLine>
+            </a:ext>
+            <a:ext uri="{AF507438-7753-43E0-B8FC-AC1667EBCBE1}">
+              <a14:hiddenEffects xmlns:a14="http://schemas.microsoft.com/office/drawing/2010/main">
+                <a:effectLst>
+                  <a:outerShdw dist="35921" dir="2700000" algn="ctr" rotWithShape="0">
+                    <a:schemeClr val="bg2"/>
+                  </a:outerShdw>
+                </a:effectLst>
+              </a14:hiddenEffects>
+            </a:ext>
+          </a:extLst>
+        </p:spPr>
+        <p:txBody>
+          <a:bodyPr vert="horz" wrap="none" lIns="91440" tIns="45720" rIns="91440" bIns="45720" numCol="1" anchor="ctr" anchorCtr="0" compatLnSpc="1">
+            <a:prstTxWarp prst="textNoShape">
+              <a:avLst/>
+            </a:prstTxWarp>
+            <a:spAutoFit/>
+          </a:bodyPr>
+          <a:lstStyle/>
+          <a:p>
+            <a:pPr marL="0" marR="0" lvl="0" indent="0" algn="l" defTabSz="914400" rtl="0" eaLnBrk="0" fontAlgn="base" latinLnBrk="0" hangingPunct="0">
+              <a:lnSpc>
+                <a:spcPct val="100000"/>
+              </a:lnSpc>
+              <a:spcBef>
+                <a:spcPct val="0"/>
+              </a:spcBef>
+              <a:spcAft>
+                <a:spcPct val="0"/>
+              </a:spcAft>
+              <a:buClrTx/>
+              <a:buSzTx/>
+              <a:buFontTx/>
+              <a:buNone/>
+              <a:tabLst/>
+            </a:pPr>
+            <a:r>
+              <a:rPr kumimoji="0" lang="en-US" altLang="en-US" sz="1100" b="0" i="0" u="none" strike="noStrike" cap="none" normalizeH="0" baseline="0">
+                <a:ln>
+                  <a:noFill/>
+                </a:ln>
+                <a:solidFill>
+                  <a:schemeClr val="tx1"/>
+                </a:solidFill>
+                <a:effectLst/>
+                <a:latin typeface="Aptos" panose="020B0004020202020204" pitchFamily="34" charset="0"/>
+                <a:ea typeface="DengXian" panose="02010600030101010101" pitchFamily="2" charset="-122"/>
+                <a:cs typeface="Times New Roman" panose="02020603050405020304" pitchFamily="18" charset="0"/>
+              </a:rPr>
+              <a:t>PCB Part Number &amp; Revision:</a:t>
+            </a:r>
+            <a:br>
+              <a:rPr kumimoji="0" lang="en-US" altLang="en-US" sz="1100" b="0" i="0" u="none" strike="noStrike" cap="none" normalizeH="0" baseline="0">
+                <a:ln>
+                  <a:noFill/>
+                </a:ln>
+                <a:solidFill>
+                  <a:schemeClr val="tx1"/>
+                </a:solidFill>
+                <a:effectLst/>
+                <a:latin typeface="Aptos" panose="020B0004020202020204" pitchFamily="34" charset="0"/>
+                <a:ea typeface="DengXian" panose="02010600030101010101" pitchFamily="2" charset="-122"/>
+                <a:cs typeface="Times New Roman" panose="02020603050405020304" pitchFamily="18" charset="0"/>
+              </a:rPr>
+            </a:br>
+            <a:br>
+              <a:rPr kumimoji="0" lang="en-US" altLang="en-US" sz="1100" b="0" i="0" u="none" strike="noStrike" cap="none" normalizeH="0" baseline="0">
+                <a:ln>
+                  <a:noFill/>
+                </a:ln>
+                <a:solidFill>
+                  <a:schemeClr val="tx1"/>
+                </a:solidFill>
+                <a:effectLst/>
+                <a:latin typeface="Aptos" panose="020B0004020202020204" pitchFamily="34" charset="0"/>
+                <a:ea typeface="DengXian" panose="02010600030101010101" pitchFamily="2" charset="-122"/>
+                <a:cs typeface="Times New Roman" panose="02020603050405020304" pitchFamily="18" charset="0"/>
+              </a:rPr>
+            </a:br>
+            <a:r>
+              <a:rPr kumimoji="0" lang="en-US" altLang="en-US" sz="1100" b="0" i="0" u="none" strike="noStrike" cap="none" normalizeH="0" baseline="0">
+                <a:ln>
+                  <a:noFill/>
+                </a:ln>
+                <a:solidFill>
+                  <a:schemeClr val="tx1"/>
+                </a:solidFill>
+                <a:effectLst/>
+                <a:latin typeface="Aptos" panose="020B0004020202020204" pitchFamily="34" charset="0"/>
+                <a:ea typeface="DengXian" panose="02010600030101010101" pitchFamily="2" charset="-122"/>
+                <a:cs typeface="Times New Roman" panose="02020603050405020304" pitchFamily="18" charset="0"/>
+              </a:rPr>
+              <a:t>Assembled PCB P/N and Revision:</a:t>
+            </a:r>
+            <a:br>
+              <a:rPr kumimoji="0" lang="en-US" altLang="en-US" sz="1100" b="0" i="0" u="none" strike="noStrike" cap="none" normalizeH="0" baseline="0">
+                <a:ln>
+                  <a:noFill/>
+                </a:ln>
+                <a:solidFill>
+                  <a:schemeClr val="tx1"/>
+                </a:solidFill>
+                <a:effectLst/>
+                <a:latin typeface="Aptos" panose="020B0004020202020204" pitchFamily="34" charset="0"/>
+                <a:ea typeface="DengXian" panose="02010600030101010101" pitchFamily="2" charset="-122"/>
+                <a:cs typeface="Times New Roman" panose="02020603050405020304" pitchFamily="18" charset="0"/>
+              </a:rPr>
+            </a:br>
+            <a:br>
+              <a:rPr kumimoji="0" lang="en-US" altLang="en-US" sz="1100" b="0" i="0" u="none" strike="noStrike" cap="none" normalizeH="0" baseline="0">
+                <a:ln>
+                  <a:noFill/>
+                </a:ln>
+                <a:solidFill>
+                  <a:schemeClr val="tx1"/>
+                </a:solidFill>
+                <a:effectLst/>
+                <a:latin typeface="Aptos" panose="020B0004020202020204" pitchFamily="34" charset="0"/>
+                <a:ea typeface="DengXian" panose="02010600030101010101" pitchFamily="2" charset="-122"/>
+                <a:cs typeface="Times New Roman" panose="02020603050405020304" pitchFamily="18" charset="0"/>
+              </a:rPr>
+            </a:br>
+            <a:endParaRPr kumimoji="0" lang="en-US" altLang="en-US" sz="400" b="0" i="0" u="none" strike="noStrike" cap="none" normalizeH="0" baseline="0">
+              <a:ln>
+                <a:noFill/>
+              </a:ln>
+              <a:solidFill>
+                <a:schemeClr val="tx1"/>
+              </a:solidFill>
+              <a:effectLst/>
+            </a:endParaRPr>
+          </a:p>
+          <a:p>
+            <a:pPr marL="0" marR="0" lvl="0" indent="0" algn="l" defTabSz="914400" rtl="0" eaLnBrk="0" fontAlgn="base" latinLnBrk="0" hangingPunct="0">
+              <a:lnSpc>
+                <a:spcPct val="100000"/>
+              </a:lnSpc>
+              <a:spcBef>
+                <a:spcPct val="0"/>
+              </a:spcBef>
+              <a:spcAft>
+                <a:spcPct val="0"/>
+              </a:spcAft>
+              <a:buClrTx/>
+              <a:buSzTx/>
+              <a:buFontTx/>
+              <a:buNone/>
+              <a:tabLst/>
+            </a:pPr>
+            <a:endParaRPr kumimoji="0" lang="en-US" altLang="en-US" sz="1800" b="0" i="0" u="none" strike="noStrike" cap="none" normalizeH="0" baseline="0">
+              <a:ln>
+                <a:noFill/>
+              </a:ln>
+              <a:solidFill>
+                <a:schemeClr val="tx1"/>
+              </a:solidFill>
+              <a:effectLst/>
+              <a:latin typeface="Arial" panose="020B0604020202020204" pitchFamily="34" charset="0"/>
+            </a:endParaRPr>
+          </a:p>
+        </p:txBody>
+      </p:sp>
+      <p:sp>
+        <p:nvSpPr>
+          <p:cNvPr id="61" name="Rectangle 58">
+            <a:extLst>
+              <a:ext uri="{FF2B5EF4-FFF2-40B4-BE49-F238E27FC236}">
+                <a16:creationId xmlns:a16="http://schemas.microsoft.com/office/drawing/2014/main" id="{ED0314FC-2DC2-C67A-33AC-B56036072E3E}"/>
+              </a:ext>
+            </a:extLst>
+          </p:cNvPr>
+          <p:cNvSpPr>
+            <a:spLocks noChangeArrowheads="1"/>
+          </p:cNvSpPr>
+          <p:nvPr/>
+        </p:nvSpPr>
+        <p:spPr bwMode="auto">
+          <a:xfrm>
+            <a:off x="152400" y="609600"/>
+            <a:ext cx="6858000" cy="0"/>
+          </a:xfrm>
+          <a:prstGeom prst="rect">
+            <a:avLst/>
+          </a:prstGeom>
+          <a:noFill/>
+          <a:ln>
+            <a:noFill/>
+          </a:ln>
+          <a:effectLst/>
+          <a:extLst>
+            <a:ext uri="{909E8E84-426E-40DD-AFC4-6F175D3DCCD1}">
+              <a14:hiddenFill xmlns:a14="http://schemas.microsoft.com/office/drawing/2010/main">
+                <a:solidFill>
+                  <a:schemeClr val="accent1"/>
+                </a:solidFill>
+              </a14:hiddenFill>
+            </a:ext>
+            <a:ext uri="{91240B29-F687-4F45-9708-019B960494DF}">
+              <a14:hiddenLine xmlns:a14="http://schemas.microsoft.com/office/drawing/2010/main" w="9525">
+                <a:solidFill>
+                  <a:schemeClr val="tx1"/>
+                </a:solidFill>
+                <a:miter lim="800000"/>
+                <a:headEnd/>
+                <a:tailEnd/>
+              </a14:hiddenLine>
+            </a:ext>
+            <a:ext uri="{AF507438-7753-43E0-B8FC-AC1667EBCBE1}">
+              <a14:hiddenEffects xmlns:a14="http://schemas.microsoft.com/office/drawing/2010/main">
+                <a:effectLst>
+                  <a:outerShdw dist="35921" dir="2700000" algn="ctr" rotWithShape="0">
+                    <a:schemeClr val="bg2"/>
+                  </a:outerShdw>
+                </a:effectLst>
+              </a14:hiddenEffects>
+            </a:ext>
+          </a:extLst>
+        </p:spPr>
+        <p:txBody>
+          <a:bodyPr vert="horz" wrap="none" lIns="91440" tIns="45720" rIns="91440" bIns="45720" numCol="1" anchor="ctr" anchorCtr="0" compatLnSpc="1">
+            <a:prstTxWarp prst="textNoShape">
+              <a:avLst/>
+            </a:prstTxWarp>
+            <a:spAutoFit/>
+          </a:bodyPr>
+          <a:lstStyle/>
+          <a:p>
+            <a:pPr marL="0" marR="0" lvl="0" indent="0" algn="l" defTabSz="914400" rtl="0" eaLnBrk="0" fontAlgn="base" latinLnBrk="0" hangingPunct="0">
+              <a:lnSpc>
+                <a:spcPct val="100000"/>
+              </a:lnSpc>
+              <a:spcBef>
+                <a:spcPct val="0"/>
+              </a:spcBef>
+              <a:spcAft>
+                <a:spcPct val="0"/>
+              </a:spcAft>
+              <a:buClrTx/>
+              <a:buSzTx/>
+              <a:buFontTx/>
+              <a:buNone/>
+              <a:tabLst/>
+            </a:pPr>
+            <a:r>
+              <a:rPr kumimoji="0" lang="en-US" altLang="en-US" sz="1100" b="0" i="0" u="none" strike="noStrike" cap="none" normalizeH="0" baseline="0">
+                <a:ln>
+                  <a:noFill/>
+                </a:ln>
+                <a:solidFill>
+                  <a:schemeClr val="tx1"/>
+                </a:solidFill>
+                <a:effectLst/>
+                <a:latin typeface="Aptos" panose="020B0004020202020204" pitchFamily="34" charset="0"/>
+                <a:ea typeface="DengXian" panose="02010600030101010101" pitchFamily="2" charset="-122"/>
+                <a:cs typeface="Times New Roman" panose="02020603050405020304" pitchFamily="18" charset="0"/>
+              </a:rPr>
+              <a:t>Engineer:</a:t>
+            </a:r>
+            <a:br>
+              <a:rPr kumimoji="0" lang="en-US" altLang="en-US" sz="1100" b="0" i="0" u="none" strike="noStrike" cap="none" normalizeH="0" baseline="0">
+                <a:ln>
+                  <a:noFill/>
+                </a:ln>
+                <a:solidFill>
+                  <a:schemeClr val="tx1"/>
+                </a:solidFill>
+                <a:effectLst/>
+                <a:latin typeface="Aptos" panose="020B0004020202020204" pitchFamily="34" charset="0"/>
+                <a:ea typeface="DengXian" panose="02010600030101010101" pitchFamily="2" charset="-122"/>
+                <a:cs typeface="Times New Roman" panose="02020603050405020304" pitchFamily="18" charset="0"/>
+              </a:rPr>
+            </a:br>
+            <a:br>
+              <a:rPr kumimoji="0" lang="en-US" altLang="en-US" sz="1100" b="0" i="0" u="none" strike="noStrike" cap="none" normalizeH="0" baseline="0">
+                <a:ln>
+                  <a:noFill/>
+                </a:ln>
+                <a:solidFill>
+                  <a:schemeClr val="tx1"/>
+                </a:solidFill>
+                <a:effectLst/>
+                <a:latin typeface="Aptos" panose="020B0004020202020204" pitchFamily="34" charset="0"/>
+                <a:ea typeface="DengXian" panose="02010600030101010101" pitchFamily="2" charset="-122"/>
+                <a:cs typeface="Times New Roman" panose="02020603050405020304" pitchFamily="18" charset="0"/>
+              </a:rPr>
+            </a:br>
+            <a:r>
+              <a:rPr kumimoji="0" lang="en-US" altLang="en-US" sz="1100" b="0" i="0" u="none" strike="noStrike" cap="none" normalizeH="0" baseline="0">
+                <a:ln>
+                  <a:noFill/>
+                </a:ln>
+                <a:solidFill>
+                  <a:schemeClr val="tx1"/>
+                </a:solidFill>
+                <a:effectLst/>
+                <a:latin typeface="Aptos" panose="020B0004020202020204" pitchFamily="34" charset="0"/>
+                <a:ea typeface="DengXian" panose="02010600030101010101" pitchFamily="2" charset="-122"/>
+                <a:cs typeface="Times New Roman" panose="02020603050405020304" pitchFamily="18" charset="0"/>
+              </a:rPr>
+              <a:t>Date:</a:t>
+            </a:r>
+            <a:br>
+              <a:rPr kumimoji="0" lang="en-US" altLang="en-US" sz="1100" b="0" i="0" u="none" strike="noStrike" cap="none" normalizeH="0" baseline="0">
+                <a:ln>
+                  <a:noFill/>
+                </a:ln>
+                <a:solidFill>
+                  <a:schemeClr val="tx1"/>
+                </a:solidFill>
+                <a:effectLst/>
+                <a:latin typeface="Aptos" panose="020B0004020202020204" pitchFamily="34" charset="0"/>
+                <a:ea typeface="DengXian" panose="02010600030101010101" pitchFamily="2" charset="-122"/>
+                <a:cs typeface="Times New Roman" panose="02020603050405020304" pitchFamily="18" charset="0"/>
+              </a:rPr>
+            </a:br>
+            <a:br>
+              <a:rPr kumimoji="0" lang="en-US" altLang="en-US" sz="1100" b="0" i="0" u="none" strike="noStrike" cap="none" normalizeH="0" baseline="0">
+                <a:ln>
+                  <a:noFill/>
+                </a:ln>
+                <a:solidFill>
+                  <a:schemeClr val="tx1"/>
+                </a:solidFill>
+                <a:effectLst/>
+                <a:latin typeface="Aptos" panose="020B0004020202020204" pitchFamily="34" charset="0"/>
+                <a:ea typeface="DengXian" panose="02010600030101010101" pitchFamily="2" charset="-122"/>
+                <a:cs typeface="Times New Roman" panose="02020603050405020304" pitchFamily="18" charset="0"/>
+              </a:rPr>
+            </a:br>
+            <a:r>
+              <a:rPr kumimoji="0" lang="en-US" altLang="en-US" sz="1100" b="0" i="0" u="none" strike="noStrike" cap="none" normalizeH="0" baseline="0">
+                <a:ln>
+                  <a:noFill/>
+                </a:ln>
+                <a:solidFill>
+                  <a:schemeClr val="tx1"/>
+                </a:solidFill>
+                <a:effectLst/>
+                <a:latin typeface="Aptos" panose="020B0004020202020204" pitchFamily="34" charset="0"/>
+                <a:ea typeface="DengXian" panose="02010600030101010101" pitchFamily="2" charset="-122"/>
+                <a:cs typeface="Times New Roman" panose="02020603050405020304" pitchFamily="18" charset="0"/>
+              </a:rPr>
+              <a:t>Attendees:</a:t>
+            </a:r>
+            <a:br>
+              <a:rPr kumimoji="0" lang="en-US" altLang="en-US" sz="1100" b="0" i="0" u="none" strike="noStrike" cap="none" normalizeH="0" baseline="0">
+                <a:ln>
+                  <a:noFill/>
+                </a:ln>
+                <a:solidFill>
+                  <a:schemeClr val="tx1"/>
+                </a:solidFill>
+                <a:effectLst/>
+                <a:latin typeface="Aptos" panose="020B0004020202020204" pitchFamily="34" charset="0"/>
+                <a:ea typeface="DengXian" panose="02010600030101010101" pitchFamily="2" charset="-122"/>
+                <a:cs typeface="Times New Roman" panose="02020603050405020304" pitchFamily="18" charset="0"/>
+              </a:rPr>
+            </a:br>
+            <a:br>
+              <a:rPr kumimoji="0" lang="en-US" altLang="en-US" sz="1100" b="0" i="0" u="none" strike="noStrike" cap="none" normalizeH="0" baseline="0">
+                <a:ln>
+                  <a:noFill/>
+                </a:ln>
+                <a:solidFill>
+                  <a:schemeClr val="tx1"/>
+                </a:solidFill>
+                <a:effectLst/>
+                <a:latin typeface="Aptos" panose="020B0004020202020204" pitchFamily="34" charset="0"/>
+                <a:ea typeface="DengXian" panose="02010600030101010101" pitchFamily="2" charset="-122"/>
+                <a:cs typeface="Times New Roman" panose="02020603050405020304" pitchFamily="18" charset="0"/>
+              </a:rPr>
+            </a:br>
+            <a:endParaRPr kumimoji="0" lang="en-US" altLang="en-US" sz="400" b="0" i="0" u="none" strike="noStrike" cap="none" normalizeH="0" baseline="0">
+              <a:ln>
+                <a:noFill/>
+              </a:ln>
+              <a:solidFill>
+                <a:schemeClr val="tx1"/>
+              </a:solidFill>
+              <a:effectLst/>
+            </a:endParaRPr>
+          </a:p>
+          <a:p>
+            <a:pPr marL="0" marR="0" lvl="0" indent="0" algn="l" defTabSz="914400" rtl="0" eaLnBrk="0" fontAlgn="base" latinLnBrk="0" hangingPunct="0">
+              <a:lnSpc>
+                <a:spcPct val="100000"/>
+              </a:lnSpc>
+              <a:spcBef>
+                <a:spcPct val="0"/>
+              </a:spcBef>
+              <a:spcAft>
+                <a:spcPct val="0"/>
+              </a:spcAft>
+              <a:buClrTx/>
+              <a:buSzTx/>
+              <a:buFontTx/>
+              <a:buNone/>
+              <a:tabLst/>
+            </a:pPr>
+            <a:r>
+              <a:rPr kumimoji="0" lang="en-US" altLang="en-US" sz="1100" b="0" i="0" u="none" strike="noStrike" cap="none" normalizeH="0" baseline="0">
+                <a:ln>
+                  <a:noFill/>
+                </a:ln>
+                <a:solidFill>
+                  <a:schemeClr val="tx1"/>
+                </a:solidFill>
+                <a:effectLst/>
+                <a:latin typeface="Aptos" panose="020B0004020202020204" pitchFamily="34" charset="0"/>
+                <a:ea typeface="DengXian" panose="02010600030101010101" pitchFamily="2" charset="-122"/>
+                <a:cs typeface="Times New Roman" panose="02020603050405020304" pitchFamily="18" charset="0"/>
+              </a:rPr>
+              <a:t>Part Placement </a:t>
+            </a:r>
+            <a:endParaRPr kumimoji="0" lang="en-US" altLang="en-US" sz="400" b="0" i="0" u="none" strike="noStrike" cap="none" normalizeH="0" baseline="0">
+              <a:ln>
+                <a:noFill/>
+              </a:ln>
+              <a:solidFill>
+                <a:schemeClr val="tx1"/>
+              </a:solidFill>
+              <a:effectLst/>
+            </a:endParaRPr>
+          </a:p>
+          <a:p>
+            <a:pPr marL="0" marR="0" lvl="0" indent="0" algn="l" defTabSz="914400" rtl="0" eaLnBrk="0" fontAlgn="base" latinLnBrk="0" hangingPunct="0">
+              <a:lnSpc>
+                <a:spcPct val="100000"/>
+              </a:lnSpc>
+              <a:spcBef>
+                <a:spcPct val="0"/>
+              </a:spcBef>
+              <a:spcAft>
+                <a:spcPct val="0"/>
+              </a:spcAft>
+              <a:buClrTx/>
+              <a:buSzTx/>
+              <a:buFontTx/>
+              <a:buNone/>
+              <a:tabLst/>
+            </a:pPr>
+            <a:endParaRPr kumimoji="0" lang="en-US" altLang="en-US" sz="1800" b="0" i="0" u="none" strike="noStrike" cap="none" normalizeH="0" baseline="0">
+              <a:ln>
+                <a:noFill/>
+              </a:ln>
+              <a:solidFill>
+                <a:schemeClr val="tx1"/>
+              </a:solidFill>
+              <a:effectLst/>
+              <a:latin typeface="Arial" panose="020B0604020202020204" pitchFamily="34" charset="0"/>
+            </a:endParaRPr>
+          </a:p>
+        </p:txBody>
+      </p:sp>
+      <p:sp>
+        <p:nvSpPr>
+          <p:cNvPr id="62" name="Rectangle 59">
+            <a:extLst>
+              <a:ext uri="{FF2B5EF4-FFF2-40B4-BE49-F238E27FC236}">
+                <a16:creationId xmlns:a16="http://schemas.microsoft.com/office/drawing/2014/main" id="{DA70A0AB-812E-DD33-32B8-B15B412F399C}"/>
+              </a:ext>
+            </a:extLst>
+          </p:cNvPr>
+          <p:cNvSpPr>
+            <a:spLocks noChangeArrowheads="1"/>
+          </p:cNvSpPr>
+          <p:nvPr/>
+        </p:nvSpPr>
+        <p:spPr bwMode="auto">
+          <a:xfrm>
+            <a:off x="609600" y="609600"/>
+            <a:ext cx="6858000" cy="0"/>
+          </a:xfrm>
+          <a:prstGeom prst="rect">
+            <a:avLst/>
+          </a:prstGeom>
+          <a:noFill/>
+          <a:ln>
+            <a:noFill/>
+          </a:ln>
+          <a:effectLst/>
+          <a:extLst>
+            <a:ext uri="{909E8E84-426E-40DD-AFC4-6F175D3DCCD1}">
+              <a14:hiddenFill xmlns:a14="http://schemas.microsoft.com/office/drawing/2010/main">
+                <a:solidFill>
+                  <a:schemeClr val="accent1"/>
+                </a:solidFill>
+              </a14:hiddenFill>
+            </a:ext>
+            <a:ext uri="{91240B29-F687-4F45-9708-019B960494DF}">
+              <a14:hiddenLine xmlns:a14="http://schemas.microsoft.com/office/drawing/2010/main" w="9525">
+                <a:solidFill>
+                  <a:schemeClr val="tx1"/>
+                </a:solidFill>
+                <a:miter lim="800000"/>
+                <a:headEnd/>
+                <a:tailEnd/>
+              </a14:hiddenLine>
+            </a:ext>
+            <a:ext uri="{AF507438-7753-43E0-B8FC-AC1667EBCBE1}">
+              <a14:hiddenEffects xmlns:a14="http://schemas.microsoft.com/office/drawing/2010/main">
+                <a:effectLst>
+                  <a:outerShdw dist="35921" dir="2700000" algn="ctr" rotWithShape="0">
+                    <a:schemeClr val="bg2"/>
+                  </a:outerShdw>
+                </a:effectLst>
+              </a14:hiddenEffects>
+            </a:ext>
+          </a:extLst>
+        </p:spPr>
+        <p:txBody>
+          <a:bodyPr vert="horz" wrap="none" lIns="91440" tIns="45720" rIns="91440" bIns="45720" numCol="1" anchor="ctr" anchorCtr="0" compatLnSpc="1">
+            <a:prstTxWarp prst="textNoShape">
+              <a:avLst/>
+            </a:prstTxWarp>
+            <a:spAutoFit/>
+          </a:bodyPr>
+          <a:lstStyle/>
+          <a:p>
+            <a:pPr marL="0" marR="0" lvl="0" indent="0" algn="l" defTabSz="914400" rtl="0" eaLnBrk="0" fontAlgn="base" latinLnBrk="0" hangingPunct="0">
+              <a:lnSpc>
+                <a:spcPct val="100000"/>
+              </a:lnSpc>
+              <a:spcBef>
+                <a:spcPct val="0"/>
+              </a:spcBef>
+              <a:spcAft>
+                <a:spcPct val="0"/>
+              </a:spcAft>
+              <a:buClrTx/>
+              <a:buSzTx/>
+              <a:buFontTx/>
+              <a:buNone/>
+              <a:tabLst/>
+            </a:pPr>
+            <a:r>
+              <a:rPr kumimoji="0" lang="en-US" altLang="en-US" sz="1100" b="0" i="0" u="none" strike="noStrike" cap="none" normalizeH="0" baseline="0">
+                <a:ln>
+                  <a:noFill/>
+                </a:ln>
+                <a:solidFill>
+                  <a:schemeClr val="tx1"/>
+                </a:solidFill>
+                <a:effectLst/>
+                <a:latin typeface="Aptos" panose="020B0004020202020204" pitchFamily="34" charset="0"/>
+                <a:ea typeface="DengXian" panose="02010600030101010101" pitchFamily="2" charset="-122"/>
+                <a:cs typeface="Times New Roman" panose="02020603050405020304" pitchFamily="18" charset="0"/>
+              </a:rPr>
+              <a:t>1. Polarized components checked ☑ NA </a:t>
+            </a:r>
+            <a:endParaRPr kumimoji="0" lang="en-US" altLang="en-US" sz="400" b="0" i="0" u="none" strike="noStrike" cap="none" normalizeH="0" baseline="0">
+              <a:ln>
+                <a:noFill/>
+              </a:ln>
+              <a:solidFill>
+                <a:schemeClr val="tx1"/>
+              </a:solidFill>
+              <a:effectLst/>
+            </a:endParaRPr>
+          </a:p>
+          <a:p>
+            <a:pPr marL="0" marR="0" lvl="0" indent="0" algn="l" defTabSz="914400" rtl="0" eaLnBrk="0" fontAlgn="base" latinLnBrk="0" hangingPunct="0">
+              <a:lnSpc>
+                <a:spcPct val="100000"/>
+              </a:lnSpc>
+              <a:spcBef>
+                <a:spcPct val="0"/>
+              </a:spcBef>
+              <a:spcAft>
+                <a:spcPct val="0"/>
+              </a:spcAft>
+              <a:buClrTx/>
+              <a:buSzTx/>
+              <a:buFontTx/>
+              <a:buNone/>
+              <a:tabLst/>
+            </a:pPr>
+            <a:endParaRPr kumimoji="0" lang="en-US" altLang="en-US" sz="1800" b="0" i="0" u="none" strike="noStrike" cap="none" normalizeH="0" baseline="0">
+              <a:ln>
+                <a:noFill/>
+              </a:ln>
+              <a:solidFill>
+                <a:schemeClr val="tx1"/>
+              </a:solidFill>
+              <a:effectLst/>
+              <a:latin typeface="Arial" panose="020B0604020202020204" pitchFamily="34" charset="0"/>
+            </a:endParaRPr>
+          </a:p>
+        </p:txBody>
+      </p:sp>
+      <p:sp>
+        <p:nvSpPr>
+          <p:cNvPr id="63" name="Rectangle 60">
+            <a:extLst>
+              <a:ext uri="{FF2B5EF4-FFF2-40B4-BE49-F238E27FC236}">
+                <a16:creationId xmlns:a16="http://schemas.microsoft.com/office/drawing/2014/main" id="{DFBE1480-CD62-B868-C93F-DDCCD27B457D}"/>
+              </a:ext>
+            </a:extLst>
+          </p:cNvPr>
+          <p:cNvSpPr>
+            <a:spLocks noChangeArrowheads="1"/>
+          </p:cNvSpPr>
+          <p:nvPr/>
+        </p:nvSpPr>
+        <p:spPr bwMode="auto">
+          <a:xfrm>
+            <a:off x="609600" y="609600"/>
+            <a:ext cx="6858000" cy="0"/>
+          </a:xfrm>
+          <a:prstGeom prst="rect">
+            <a:avLst/>
+          </a:prstGeom>
+          <a:noFill/>
+          <a:ln>
+            <a:noFill/>
+          </a:ln>
+          <a:effectLst/>
+          <a:extLst>
+            <a:ext uri="{909E8E84-426E-40DD-AFC4-6F175D3DCCD1}">
+              <a14:hiddenFill xmlns:a14="http://schemas.microsoft.com/office/drawing/2010/main">
+                <a:solidFill>
+                  <a:schemeClr val="accent1"/>
+                </a:solidFill>
+              </a14:hiddenFill>
+            </a:ext>
+            <a:ext uri="{91240B29-F687-4F45-9708-019B960494DF}">
+              <a14:hiddenLine xmlns:a14="http://schemas.microsoft.com/office/drawing/2010/main" w="9525">
+                <a:solidFill>
+                  <a:schemeClr val="tx1"/>
+                </a:solidFill>
+                <a:miter lim="800000"/>
+                <a:headEnd/>
+                <a:tailEnd/>
+              </a14:hiddenLine>
+            </a:ext>
+            <a:ext uri="{AF507438-7753-43E0-B8FC-AC1667EBCBE1}">
+              <a14:hiddenEffects xmlns:a14="http://schemas.microsoft.com/office/drawing/2010/main">
+                <a:effectLst>
+                  <a:outerShdw dist="35921" dir="2700000" algn="ctr" rotWithShape="0">
+                    <a:schemeClr val="bg2"/>
+                  </a:outerShdw>
+                </a:effectLst>
+              </a14:hiddenEffects>
+            </a:ext>
+          </a:extLst>
+        </p:spPr>
+        <p:txBody>
+          <a:bodyPr vert="horz" wrap="none" lIns="91440" tIns="45720" rIns="91440" bIns="45720" numCol="1" anchor="ctr" anchorCtr="0" compatLnSpc="1">
+            <a:prstTxWarp prst="textNoShape">
+              <a:avLst/>
+            </a:prstTxWarp>
+            <a:spAutoFit/>
+          </a:bodyPr>
+          <a:lstStyle/>
+          <a:p>
+            <a:pPr marL="0" marR="0" lvl="0" indent="0" algn="l" defTabSz="914400" rtl="0" eaLnBrk="0" fontAlgn="base" latinLnBrk="0" hangingPunct="0">
+              <a:lnSpc>
+                <a:spcPct val="100000"/>
+              </a:lnSpc>
+              <a:spcBef>
+                <a:spcPct val="0"/>
+              </a:spcBef>
+              <a:spcAft>
+                <a:spcPct val="0"/>
+              </a:spcAft>
+              <a:buClrTx/>
+              <a:buSzTx/>
+              <a:buFontTx/>
+              <a:buNone/>
+              <a:tabLst/>
+            </a:pPr>
+            <a:r>
+              <a:rPr kumimoji="0" lang="en-US" altLang="en-US" sz="1100" b="0" i="0" u="none" strike="noStrike" cap="none" normalizeH="0" baseline="0">
+                <a:ln>
+                  <a:noFill/>
+                </a:ln>
+                <a:solidFill>
+                  <a:schemeClr val="tx1"/>
+                </a:solidFill>
+                <a:effectLst/>
+                <a:latin typeface="Aptos" panose="020B0004020202020204" pitchFamily="34" charset="0"/>
+                <a:ea typeface="DengXian" panose="02010600030101010101" pitchFamily="2" charset="-122"/>
+                <a:cs typeface="Times New Roman" panose="02020603050405020304" pitchFamily="18" charset="0"/>
+              </a:rPr>
+              <a:t>2. Check the orientation of all connectors </a:t>
+            </a:r>
+            <a:endParaRPr kumimoji="0" lang="en-US" altLang="en-US" sz="400" b="0" i="0" u="none" strike="noStrike" cap="none" normalizeH="0" baseline="0">
+              <a:ln>
+                <a:noFill/>
+              </a:ln>
+              <a:solidFill>
+                <a:schemeClr val="tx1"/>
+              </a:solidFill>
+              <a:effectLst/>
+            </a:endParaRPr>
+          </a:p>
+          <a:p>
+            <a:pPr marL="0" marR="0" lvl="0" indent="0" algn="l" defTabSz="914400" rtl="0" eaLnBrk="0" fontAlgn="base" latinLnBrk="0" hangingPunct="0">
+              <a:lnSpc>
+                <a:spcPct val="100000"/>
+              </a:lnSpc>
+              <a:spcBef>
+                <a:spcPct val="0"/>
+              </a:spcBef>
+              <a:spcAft>
+                <a:spcPct val="0"/>
+              </a:spcAft>
+              <a:buClrTx/>
+              <a:buSzTx/>
+              <a:buFontTx/>
+              <a:buNone/>
+              <a:tabLst/>
+            </a:pPr>
+            <a:endParaRPr kumimoji="0" lang="en-US" altLang="en-US" sz="1800" b="0" i="0" u="none" strike="noStrike" cap="none" normalizeH="0" baseline="0">
+              <a:ln>
+                <a:noFill/>
+              </a:ln>
+              <a:solidFill>
+                <a:schemeClr val="tx1"/>
+              </a:solidFill>
+              <a:effectLst/>
+              <a:latin typeface="Arial" panose="020B0604020202020204" pitchFamily="34" charset="0"/>
+            </a:endParaRPr>
+          </a:p>
+        </p:txBody>
+      </p:sp>
+      <p:sp>
+        <p:nvSpPr>
+          <p:cNvPr id="64" name="Rectangle 61">
+            <a:extLst>
+              <a:ext uri="{FF2B5EF4-FFF2-40B4-BE49-F238E27FC236}">
+                <a16:creationId xmlns:a16="http://schemas.microsoft.com/office/drawing/2014/main" id="{329CA520-2C5F-D816-AD33-E69825BE37BA}"/>
+              </a:ext>
+            </a:extLst>
+          </p:cNvPr>
+          <p:cNvSpPr>
+            <a:spLocks noChangeArrowheads="1"/>
+          </p:cNvSpPr>
+          <p:nvPr/>
+        </p:nvSpPr>
+        <p:spPr bwMode="auto">
+          <a:xfrm>
+            <a:off x="609600" y="609600"/>
+            <a:ext cx="6858000" cy="0"/>
+          </a:xfrm>
+          <a:prstGeom prst="rect">
+            <a:avLst/>
+          </a:prstGeom>
+          <a:noFill/>
+          <a:ln>
+            <a:noFill/>
+          </a:ln>
+          <a:effectLst/>
+          <a:extLst>
+            <a:ext uri="{909E8E84-426E-40DD-AFC4-6F175D3DCCD1}">
+              <a14:hiddenFill xmlns:a14="http://schemas.microsoft.com/office/drawing/2010/main">
+                <a:solidFill>
+                  <a:schemeClr val="accent1"/>
+                </a:solidFill>
+              </a14:hiddenFill>
+            </a:ext>
+            <a:ext uri="{91240B29-F687-4F45-9708-019B960494DF}">
+              <a14:hiddenLine xmlns:a14="http://schemas.microsoft.com/office/drawing/2010/main" w="9525">
+                <a:solidFill>
+                  <a:schemeClr val="tx1"/>
+                </a:solidFill>
+                <a:miter lim="800000"/>
+                <a:headEnd/>
+                <a:tailEnd/>
+              </a14:hiddenLine>
+            </a:ext>
+            <a:ext uri="{AF507438-7753-43E0-B8FC-AC1667EBCBE1}">
+              <a14:hiddenEffects xmlns:a14="http://schemas.microsoft.com/office/drawing/2010/main">
+                <a:effectLst>
+                  <a:outerShdw dist="35921" dir="2700000" algn="ctr" rotWithShape="0">
+                    <a:schemeClr val="bg2"/>
+                  </a:outerShdw>
+                </a:effectLst>
+              </a14:hiddenEffects>
+            </a:ext>
+          </a:extLst>
+        </p:spPr>
+        <p:txBody>
+          <a:bodyPr vert="horz" wrap="none" lIns="91440" tIns="45720" rIns="91440" bIns="45720" numCol="1" anchor="ctr" anchorCtr="0" compatLnSpc="1">
+            <a:prstTxWarp prst="textNoShape">
+              <a:avLst/>
+            </a:prstTxWarp>
+            <a:spAutoFit/>
+          </a:bodyPr>
+          <a:lstStyle/>
+          <a:p>
+            <a:pPr marL="0" marR="0" lvl="0" indent="0" algn="l" defTabSz="914400" rtl="0" eaLnBrk="0" fontAlgn="base" latinLnBrk="0" hangingPunct="0">
+              <a:lnSpc>
+                <a:spcPct val="100000"/>
+              </a:lnSpc>
+              <a:spcBef>
+                <a:spcPct val="0"/>
+              </a:spcBef>
+              <a:spcAft>
+                <a:spcPct val="0"/>
+              </a:spcAft>
+              <a:buClrTx/>
+              <a:buSzTx/>
+              <a:buFontTx/>
+              <a:buNone/>
+              <a:tabLst/>
+            </a:pPr>
+            <a:r>
+              <a:rPr kumimoji="0" lang="en-US" altLang="en-US" sz="1100" b="0" i="0" u="none" strike="noStrike" cap="none" normalizeH="0" baseline="0">
+                <a:ln>
+                  <a:noFill/>
+                </a:ln>
+                <a:solidFill>
+                  <a:schemeClr val="tx1"/>
+                </a:solidFill>
+                <a:effectLst/>
+                <a:latin typeface="Aptos" panose="020B0004020202020204" pitchFamily="34" charset="0"/>
+                <a:ea typeface="DengXian" panose="02010600030101010101" pitchFamily="2" charset="-122"/>
+                <a:cs typeface="Times New Roman" panose="02020603050405020304" pitchFamily="18" charset="0"/>
+              </a:rPr>
+              <a:t>3. Minimum component body spacing </a:t>
+            </a:r>
+            <a:endParaRPr kumimoji="0" lang="en-US" altLang="en-US" sz="400" b="0" i="0" u="none" strike="noStrike" cap="none" normalizeH="0" baseline="0">
+              <a:ln>
+                <a:noFill/>
+              </a:ln>
+              <a:solidFill>
+                <a:schemeClr val="tx1"/>
+              </a:solidFill>
+              <a:effectLst/>
+            </a:endParaRPr>
+          </a:p>
+          <a:p>
+            <a:pPr marL="0" marR="0" lvl="0" indent="0" algn="l" defTabSz="914400" rtl="0" eaLnBrk="0" fontAlgn="base" latinLnBrk="0" hangingPunct="0">
+              <a:lnSpc>
+                <a:spcPct val="100000"/>
+              </a:lnSpc>
+              <a:spcBef>
+                <a:spcPct val="0"/>
+              </a:spcBef>
+              <a:spcAft>
+                <a:spcPct val="0"/>
+              </a:spcAft>
+              <a:buClrTx/>
+              <a:buSzTx/>
+              <a:buFontTx/>
+              <a:buNone/>
+              <a:tabLst/>
+            </a:pPr>
+            <a:endParaRPr kumimoji="0" lang="en-US" altLang="en-US" sz="1800" b="0" i="0" u="none" strike="noStrike" cap="none" normalizeH="0" baseline="0">
+              <a:ln>
+                <a:noFill/>
+              </a:ln>
+              <a:solidFill>
+                <a:schemeClr val="tx1"/>
+              </a:solidFill>
+              <a:effectLst/>
+              <a:latin typeface="Arial" panose="020B0604020202020204" pitchFamily="34" charset="0"/>
+            </a:endParaRPr>
+          </a:p>
+        </p:txBody>
+      </p:sp>
+      <p:sp>
+        <p:nvSpPr>
+          <p:cNvPr id="65" name="Rectangle 62">
+            <a:extLst>
+              <a:ext uri="{FF2B5EF4-FFF2-40B4-BE49-F238E27FC236}">
+                <a16:creationId xmlns:a16="http://schemas.microsoft.com/office/drawing/2014/main" id="{2E87E7A0-02A1-2BF1-A612-B811726AC12B}"/>
+              </a:ext>
+            </a:extLst>
+          </p:cNvPr>
+          <p:cNvSpPr>
+            <a:spLocks noChangeArrowheads="1"/>
+          </p:cNvSpPr>
+          <p:nvPr/>
+        </p:nvSpPr>
+        <p:spPr bwMode="auto">
+          <a:xfrm>
+            <a:off x="609600" y="609600"/>
+            <a:ext cx="6858000" cy="0"/>
+          </a:xfrm>
+          <a:prstGeom prst="rect">
+            <a:avLst/>
+          </a:prstGeom>
+          <a:noFill/>
+          <a:ln>
+            <a:noFill/>
+          </a:ln>
+          <a:effectLst/>
+          <a:extLst>
+            <a:ext uri="{909E8E84-426E-40DD-AFC4-6F175D3DCCD1}">
+              <a14:hiddenFill xmlns:a14="http://schemas.microsoft.com/office/drawing/2010/main">
+                <a:solidFill>
+                  <a:schemeClr val="accent1"/>
+                </a:solidFill>
+              </a14:hiddenFill>
+            </a:ext>
+            <a:ext uri="{91240B29-F687-4F45-9708-019B960494DF}">
+              <a14:hiddenLine xmlns:a14="http://schemas.microsoft.com/office/drawing/2010/main" w="9525">
+                <a:solidFill>
+                  <a:schemeClr val="tx1"/>
+                </a:solidFill>
+                <a:miter lim="800000"/>
+                <a:headEnd/>
+                <a:tailEnd/>
+              </a14:hiddenLine>
+            </a:ext>
+            <a:ext uri="{AF507438-7753-43E0-B8FC-AC1667EBCBE1}">
+              <a14:hiddenEffects xmlns:a14="http://schemas.microsoft.com/office/drawing/2010/main">
+                <a:effectLst>
+                  <a:outerShdw dist="35921" dir="2700000" algn="ctr" rotWithShape="0">
+                    <a:schemeClr val="bg2"/>
+                  </a:outerShdw>
+                </a:effectLst>
+              </a14:hiddenEffects>
+            </a:ext>
+          </a:extLst>
+        </p:spPr>
+        <p:txBody>
+          <a:bodyPr vert="horz" wrap="none" lIns="91440" tIns="45720" rIns="91440" bIns="45720" numCol="1" anchor="ctr" anchorCtr="0" compatLnSpc="1">
+            <a:prstTxWarp prst="textNoShape">
+              <a:avLst/>
+            </a:prstTxWarp>
+            <a:spAutoFit/>
+          </a:bodyPr>
+          <a:lstStyle/>
+          <a:p>
+            <a:pPr marL="0" marR="0" lvl="0" indent="0" algn="l" defTabSz="914400" rtl="0" eaLnBrk="0" fontAlgn="base" latinLnBrk="0" hangingPunct="0">
+              <a:lnSpc>
+                <a:spcPct val="100000"/>
+              </a:lnSpc>
+              <a:spcBef>
+                <a:spcPct val="0"/>
+              </a:spcBef>
+              <a:spcAft>
+                <a:spcPct val="0"/>
+              </a:spcAft>
+              <a:buClrTx/>
+              <a:buSzTx/>
+              <a:buFontTx/>
+              <a:buNone/>
+              <a:tabLst/>
+            </a:pPr>
+            <a:r>
+              <a:rPr kumimoji="0" lang="en-US" altLang="en-US" sz="1100" b="0" i="0" u="none" strike="noStrike" cap="none" normalizeH="0" baseline="0">
+                <a:ln>
+                  <a:noFill/>
+                </a:ln>
+                <a:solidFill>
+                  <a:schemeClr val="tx1"/>
+                </a:solidFill>
+                <a:effectLst/>
+                <a:latin typeface="Aptos" panose="020B0004020202020204" pitchFamily="34" charset="0"/>
+                <a:ea typeface="DengXian" panose="02010600030101010101" pitchFamily="2" charset="-122"/>
+                <a:cs typeface="Times New Roman" panose="02020603050405020304" pitchFamily="18" charset="0"/>
+              </a:rPr>
+              <a:t>4. Bypass capacitors located close to IC power pins </a:t>
+            </a:r>
+            <a:endParaRPr kumimoji="0" lang="en-US" altLang="en-US" sz="400" b="0" i="0" u="none" strike="noStrike" cap="none" normalizeH="0" baseline="0">
+              <a:ln>
+                <a:noFill/>
+              </a:ln>
+              <a:solidFill>
+                <a:schemeClr val="tx1"/>
+              </a:solidFill>
+              <a:effectLst/>
+            </a:endParaRPr>
+          </a:p>
+          <a:p>
+            <a:pPr marL="0" marR="0" lvl="0" indent="0" algn="l" defTabSz="914400" rtl="0" eaLnBrk="0" fontAlgn="base" latinLnBrk="0" hangingPunct="0">
+              <a:lnSpc>
+                <a:spcPct val="100000"/>
+              </a:lnSpc>
+              <a:spcBef>
+                <a:spcPct val="0"/>
+              </a:spcBef>
+              <a:spcAft>
+                <a:spcPct val="0"/>
+              </a:spcAft>
+              <a:buClrTx/>
+              <a:buSzTx/>
+              <a:buFontTx/>
+              <a:buNone/>
+              <a:tabLst/>
+            </a:pPr>
+            <a:endParaRPr kumimoji="0" lang="en-US" altLang="en-US" sz="1800" b="0" i="0" u="none" strike="noStrike" cap="none" normalizeH="0" baseline="0">
+              <a:ln>
+                <a:noFill/>
+              </a:ln>
+              <a:solidFill>
+                <a:schemeClr val="tx1"/>
+              </a:solidFill>
+              <a:effectLst/>
+              <a:latin typeface="Arial" panose="020B0604020202020204" pitchFamily="34" charset="0"/>
+            </a:endParaRPr>
+          </a:p>
+        </p:txBody>
+      </p:sp>
+      <p:sp>
+        <p:nvSpPr>
+          <p:cNvPr id="66" name="Rectangle 63">
+            <a:extLst>
+              <a:ext uri="{FF2B5EF4-FFF2-40B4-BE49-F238E27FC236}">
+                <a16:creationId xmlns:a16="http://schemas.microsoft.com/office/drawing/2014/main" id="{589731ED-70F0-E26E-5BCD-DE7E02577CE3}"/>
+              </a:ext>
+            </a:extLst>
+          </p:cNvPr>
+          <p:cNvSpPr>
+            <a:spLocks noChangeArrowheads="1"/>
+          </p:cNvSpPr>
+          <p:nvPr/>
+        </p:nvSpPr>
+        <p:spPr bwMode="auto">
+          <a:xfrm>
+            <a:off x="609600" y="609600"/>
+            <a:ext cx="6858000" cy="0"/>
+          </a:xfrm>
+          <a:prstGeom prst="rect">
+            <a:avLst/>
+          </a:prstGeom>
+          <a:noFill/>
+          <a:ln>
+            <a:noFill/>
+          </a:ln>
+          <a:effectLst/>
+          <a:extLst>
+            <a:ext uri="{909E8E84-426E-40DD-AFC4-6F175D3DCCD1}">
+              <a14:hiddenFill xmlns:a14="http://schemas.microsoft.com/office/drawing/2010/main">
+                <a:solidFill>
+                  <a:schemeClr val="accent1"/>
+                </a:solidFill>
+              </a14:hiddenFill>
+            </a:ext>
+            <a:ext uri="{91240B29-F687-4F45-9708-019B960494DF}">
+              <a14:hiddenLine xmlns:a14="http://schemas.microsoft.com/office/drawing/2010/main" w="9525">
+                <a:solidFill>
+                  <a:schemeClr val="tx1"/>
+                </a:solidFill>
+                <a:miter lim="800000"/>
+                <a:headEnd/>
+                <a:tailEnd/>
+              </a14:hiddenLine>
+            </a:ext>
+            <a:ext uri="{AF507438-7753-43E0-B8FC-AC1667EBCBE1}">
+              <a14:hiddenEffects xmlns:a14="http://schemas.microsoft.com/office/drawing/2010/main">
+                <a:effectLst>
+                  <a:outerShdw dist="35921" dir="2700000" algn="ctr" rotWithShape="0">
+                    <a:schemeClr val="bg2"/>
+                  </a:outerShdw>
+                </a:effectLst>
+              </a14:hiddenEffects>
+            </a:ext>
+          </a:extLst>
+        </p:spPr>
+        <p:txBody>
+          <a:bodyPr vert="horz" wrap="none" lIns="91440" tIns="45720" rIns="91440" bIns="45720" numCol="1" anchor="ctr" anchorCtr="0" compatLnSpc="1">
+            <a:prstTxWarp prst="textNoShape">
+              <a:avLst/>
+            </a:prstTxWarp>
+            <a:spAutoFit/>
+          </a:bodyPr>
+          <a:lstStyle/>
+          <a:p>
+            <a:pPr marL="0" marR="0" lvl="0" indent="0" algn="l" defTabSz="914400" rtl="0" eaLnBrk="0" fontAlgn="base" latinLnBrk="0" hangingPunct="0">
+              <a:lnSpc>
+                <a:spcPct val="100000"/>
+              </a:lnSpc>
+              <a:spcBef>
+                <a:spcPct val="0"/>
+              </a:spcBef>
+              <a:spcAft>
+                <a:spcPct val="0"/>
+              </a:spcAft>
+              <a:buClrTx/>
+              <a:buSzTx/>
+              <a:buFontTx/>
+              <a:buNone/>
+              <a:tabLst/>
+            </a:pPr>
+            <a:r>
+              <a:rPr kumimoji="0" lang="en-US" altLang="en-US" sz="1100" b="0" i="0" u="none" strike="noStrike" cap="none" normalizeH="0" baseline="0">
+                <a:ln>
+                  <a:noFill/>
+                </a:ln>
+                <a:solidFill>
+                  <a:schemeClr val="tx1"/>
+                </a:solidFill>
+                <a:effectLst/>
+                <a:latin typeface="Aptos" panose="020B0004020202020204" pitchFamily="34" charset="0"/>
+                <a:ea typeface="DengXian" panose="02010600030101010101" pitchFamily="2" charset="-122"/>
+                <a:cs typeface="Times New Roman" panose="02020603050405020304" pitchFamily="18" charset="0"/>
+              </a:rPr>
+              <a:t>5. Verify that all series terminators are located near the source </a:t>
+            </a:r>
+            <a:endParaRPr kumimoji="0" lang="en-US" altLang="en-US" sz="400" b="0" i="0" u="none" strike="noStrike" cap="none" normalizeH="0" baseline="0">
+              <a:ln>
+                <a:noFill/>
+              </a:ln>
+              <a:solidFill>
+                <a:schemeClr val="tx1"/>
+              </a:solidFill>
+              <a:effectLst/>
+            </a:endParaRPr>
+          </a:p>
+          <a:p>
+            <a:pPr marL="0" marR="0" lvl="0" indent="0" algn="l" defTabSz="914400" rtl="0" eaLnBrk="0" fontAlgn="base" latinLnBrk="0" hangingPunct="0">
+              <a:lnSpc>
+                <a:spcPct val="100000"/>
+              </a:lnSpc>
+              <a:spcBef>
+                <a:spcPct val="0"/>
+              </a:spcBef>
+              <a:spcAft>
+                <a:spcPct val="0"/>
+              </a:spcAft>
+              <a:buClrTx/>
+              <a:buSzTx/>
+              <a:buFontTx/>
+              <a:buNone/>
+              <a:tabLst/>
+            </a:pPr>
+            <a:endParaRPr kumimoji="0" lang="en-US" altLang="en-US" sz="1800" b="0" i="0" u="none" strike="noStrike" cap="none" normalizeH="0" baseline="0">
+              <a:ln>
+                <a:noFill/>
+              </a:ln>
+              <a:solidFill>
+                <a:schemeClr val="tx1"/>
+              </a:solidFill>
+              <a:effectLst/>
+              <a:latin typeface="Arial" panose="020B0604020202020204" pitchFamily="34" charset="0"/>
+            </a:endParaRPr>
+          </a:p>
+        </p:txBody>
+      </p:sp>
+      <p:sp>
+        <p:nvSpPr>
+          <p:cNvPr id="67" name="Rectangle 64">
+            <a:extLst>
+              <a:ext uri="{FF2B5EF4-FFF2-40B4-BE49-F238E27FC236}">
+                <a16:creationId xmlns:a16="http://schemas.microsoft.com/office/drawing/2014/main" id="{C8C22436-F400-D185-D86B-FDBEAA892FFF}"/>
+              </a:ext>
+            </a:extLst>
+          </p:cNvPr>
+          <p:cNvSpPr>
+            <a:spLocks noChangeArrowheads="1"/>
+          </p:cNvSpPr>
+          <p:nvPr/>
+        </p:nvSpPr>
+        <p:spPr bwMode="auto">
+          <a:xfrm>
+            <a:off x="609600" y="609600"/>
+            <a:ext cx="6858000" cy="0"/>
+          </a:xfrm>
+          <a:prstGeom prst="rect">
+            <a:avLst/>
+          </a:prstGeom>
+          <a:noFill/>
+          <a:ln>
+            <a:noFill/>
+          </a:ln>
+          <a:effectLst/>
+          <a:extLst>
+            <a:ext uri="{909E8E84-426E-40DD-AFC4-6F175D3DCCD1}">
+              <a14:hiddenFill xmlns:a14="http://schemas.microsoft.com/office/drawing/2010/main">
+                <a:solidFill>
+                  <a:schemeClr val="accent1"/>
+                </a:solidFill>
+              </a14:hiddenFill>
+            </a:ext>
+            <a:ext uri="{91240B29-F687-4F45-9708-019B960494DF}">
+              <a14:hiddenLine xmlns:a14="http://schemas.microsoft.com/office/drawing/2010/main" w="9525">
+                <a:solidFill>
+                  <a:schemeClr val="tx1"/>
+                </a:solidFill>
+                <a:miter lim="800000"/>
+                <a:headEnd/>
+                <a:tailEnd/>
+              </a14:hiddenLine>
+            </a:ext>
+            <a:ext uri="{AF507438-7753-43E0-B8FC-AC1667EBCBE1}">
+              <a14:hiddenEffects xmlns:a14="http://schemas.microsoft.com/office/drawing/2010/main">
+                <a:effectLst>
+                  <a:outerShdw dist="35921" dir="2700000" algn="ctr" rotWithShape="0">
+                    <a:schemeClr val="bg2"/>
+                  </a:outerShdw>
+                </a:effectLst>
+              </a14:hiddenEffects>
+            </a:ext>
+          </a:extLst>
+        </p:spPr>
+        <p:txBody>
+          <a:bodyPr vert="horz" wrap="none" lIns="91440" tIns="45720" rIns="91440" bIns="45720" numCol="1" anchor="ctr" anchorCtr="0" compatLnSpc="1">
+            <a:prstTxWarp prst="textNoShape">
+              <a:avLst/>
+            </a:prstTxWarp>
+            <a:spAutoFit/>
+          </a:bodyPr>
+          <a:lstStyle/>
+          <a:p>
+            <a:pPr marL="0" marR="0" lvl="0" indent="0" algn="l" defTabSz="914400" rtl="0" eaLnBrk="0" fontAlgn="base" latinLnBrk="0" hangingPunct="0">
+              <a:lnSpc>
+                <a:spcPct val="100000"/>
+              </a:lnSpc>
+              <a:spcBef>
+                <a:spcPct val="0"/>
+              </a:spcBef>
+              <a:spcAft>
+                <a:spcPct val="0"/>
+              </a:spcAft>
+              <a:buClrTx/>
+              <a:buSzTx/>
+              <a:buFontTx/>
+              <a:buNone/>
+              <a:tabLst/>
+            </a:pPr>
+            <a:r>
+              <a:rPr kumimoji="0" lang="en-US" altLang="en-US" sz="1100" b="0" i="0" u="none" strike="noStrike" cap="none" normalizeH="0" baseline="0">
+                <a:ln>
+                  <a:noFill/>
+                </a:ln>
+                <a:solidFill>
+                  <a:schemeClr val="tx1"/>
+                </a:solidFill>
+                <a:effectLst/>
+                <a:latin typeface="Aptos" panose="020B0004020202020204" pitchFamily="34" charset="0"/>
+                <a:ea typeface="DengXian" panose="02010600030101010101" pitchFamily="2" charset="-122"/>
+                <a:cs typeface="Times New Roman" panose="02020603050405020304" pitchFamily="18" charset="0"/>
+              </a:rPr>
+              <a:t>6.1/0 drivers near where their signals leave the board NA ☑ </a:t>
+            </a:r>
+            <a:endParaRPr kumimoji="0" lang="en-US" altLang="en-US" sz="400" b="0" i="0" u="none" strike="noStrike" cap="none" normalizeH="0" baseline="0">
+              <a:ln>
+                <a:noFill/>
+              </a:ln>
+              <a:solidFill>
+                <a:schemeClr val="tx1"/>
+              </a:solidFill>
+              <a:effectLst/>
+            </a:endParaRPr>
+          </a:p>
+          <a:p>
+            <a:pPr marL="0" marR="0" lvl="0" indent="0" algn="l" defTabSz="914400" rtl="0" eaLnBrk="0" fontAlgn="base" latinLnBrk="0" hangingPunct="0">
+              <a:lnSpc>
+                <a:spcPct val="100000"/>
+              </a:lnSpc>
+              <a:spcBef>
+                <a:spcPct val="0"/>
+              </a:spcBef>
+              <a:spcAft>
+                <a:spcPct val="0"/>
+              </a:spcAft>
+              <a:buClrTx/>
+              <a:buSzTx/>
+              <a:buFontTx/>
+              <a:buNone/>
+              <a:tabLst/>
+            </a:pPr>
+            <a:r>
+              <a:rPr kumimoji="0" lang="en-US" altLang="en-US" sz="1100" b="0" i="0" u="none" strike="noStrike" cap="none" normalizeH="0" baseline="0">
+                <a:ln>
+                  <a:noFill/>
+                </a:ln>
+                <a:solidFill>
+                  <a:schemeClr val="tx1"/>
+                </a:solidFill>
+                <a:effectLst/>
+                <a:latin typeface="Aptos" panose="020B0004020202020204" pitchFamily="34" charset="0"/>
+                <a:ea typeface="DengXian" panose="02010600030101010101" pitchFamily="2" charset="-122"/>
+                <a:cs typeface="Times New Roman" panose="02020603050405020304" pitchFamily="18" charset="0"/>
+              </a:rPr>
+              <a:t>7. PCB has ground turrets, power rail test points, and test points for important signals, all labeled </a:t>
+            </a:r>
+            <a:endParaRPr kumimoji="0" lang="en-US" altLang="en-US" sz="400" b="0" i="0" u="none" strike="noStrike" cap="none" normalizeH="0" baseline="0">
+              <a:ln>
+                <a:noFill/>
+              </a:ln>
+              <a:solidFill>
+                <a:schemeClr val="tx1"/>
+              </a:solidFill>
+              <a:effectLst/>
+            </a:endParaRPr>
+          </a:p>
+          <a:p>
+            <a:pPr marL="0" marR="0" lvl="0" indent="0" algn="l" defTabSz="914400" rtl="0" eaLnBrk="0" fontAlgn="base" latinLnBrk="0" hangingPunct="0">
+              <a:lnSpc>
+                <a:spcPct val="100000"/>
+              </a:lnSpc>
+              <a:spcBef>
+                <a:spcPct val="0"/>
+              </a:spcBef>
+              <a:spcAft>
+                <a:spcPct val="0"/>
+              </a:spcAft>
+              <a:buClrTx/>
+              <a:buSzTx/>
+              <a:buFontTx/>
+              <a:buNone/>
+              <a:tabLst/>
+            </a:pPr>
+            <a:endParaRPr kumimoji="0" lang="en-US" altLang="en-US" sz="1800" b="0" i="0" u="none" strike="noStrike" cap="none" normalizeH="0" baseline="0">
+              <a:ln>
+                <a:noFill/>
+              </a:ln>
+              <a:solidFill>
+                <a:schemeClr val="tx1"/>
+              </a:solidFill>
+              <a:effectLst/>
+              <a:latin typeface="Arial" panose="020B0604020202020204" pitchFamily="34" charset="0"/>
+            </a:endParaRPr>
+          </a:p>
+        </p:txBody>
+      </p:sp>
+      <p:sp>
+        <p:nvSpPr>
+          <p:cNvPr id="68" name="Rectangle 65">
+            <a:extLst>
+              <a:ext uri="{FF2B5EF4-FFF2-40B4-BE49-F238E27FC236}">
+                <a16:creationId xmlns:a16="http://schemas.microsoft.com/office/drawing/2014/main" id="{2281444B-9AF2-F922-6E4C-E671C8F54E66}"/>
+              </a:ext>
+            </a:extLst>
+          </p:cNvPr>
+          <p:cNvSpPr>
+            <a:spLocks noChangeArrowheads="1"/>
+          </p:cNvSpPr>
+          <p:nvPr/>
+        </p:nvSpPr>
+        <p:spPr bwMode="auto">
+          <a:xfrm>
+            <a:off x="609600" y="609600"/>
+            <a:ext cx="6858000" cy="0"/>
+          </a:xfrm>
+          <a:prstGeom prst="rect">
+            <a:avLst/>
+          </a:prstGeom>
+          <a:noFill/>
+          <a:ln>
+            <a:noFill/>
+          </a:ln>
+          <a:effectLst/>
+          <a:extLst>
+            <a:ext uri="{909E8E84-426E-40DD-AFC4-6F175D3DCCD1}">
+              <a14:hiddenFill xmlns:a14="http://schemas.microsoft.com/office/drawing/2010/main">
+                <a:solidFill>
+                  <a:schemeClr val="accent1"/>
+                </a:solidFill>
+              </a14:hiddenFill>
+            </a:ext>
+            <a:ext uri="{91240B29-F687-4F45-9708-019B960494DF}">
+              <a14:hiddenLine xmlns:a14="http://schemas.microsoft.com/office/drawing/2010/main" w="9525">
+                <a:solidFill>
+                  <a:schemeClr val="tx1"/>
+                </a:solidFill>
+                <a:miter lim="800000"/>
+                <a:headEnd/>
+                <a:tailEnd/>
+              </a14:hiddenLine>
+            </a:ext>
+            <a:ext uri="{AF507438-7753-43E0-B8FC-AC1667EBCBE1}">
+              <a14:hiddenEffects xmlns:a14="http://schemas.microsoft.com/office/drawing/2010/main">
+                <a:effectLst>
+                  <a:outerShdw dist="35921" dir="2700000" algn="ctr" rotWithShape="0">
+                    <a:schemeClr val="bg2"/>
+                  </a:outerShdw>
+                </a:effectLst>
+              </a14:hiddenEffects>
+            </a:ext>
+          </a:extLst>
+        </p:spPr>
+        <p:txBody>
+          <a:bodyPr vert="horz" wrap="none" lIns="91440" tIns="45720" rIns="91440" bIns="45720" numCol="1" anchor="ctr" anchorCtr="0" compatLnSpc="1">
+            <a:prstTxWarp prst="textNoShape">
+              <a:avLst/>
+            </a:prstTxWarp>
+            <a:spAutoFit/>
+          </a:bodyPr>
+          <a:lstStyle/>
+          <a:p>
+            <a:pPr marL="0" marR="0" lvl="0" indent="0" algn="l" defTabSz="914400" rtl="0" eaLnBrk="0" fontAlgn="base" latinLnBrk="0" hangingPunct="0">
+              <a:lnSpc>
+                <a:spcPct val="100000"/>
+              </a:lnSpc>
+              <a:spcBef>
+                <a:spcPct val="0"/>
+              </a:spcBef>
+              <a:spcAft>
+                <a:spcPct val="0"/>
+              </a:spcAft>
+              <a:buClrTx/>
+              <a:buSzTx/>
+              <a:buFontTx/>
+              <a:buNone/>
+              <a:tabLst/>
+            </a:pPr>
+            <a:r>
+              <a:rPr kumimoji="0" lang="en-US" altLang="en-US" sz="1100" b="0" i="0" u="none" strike="noStrike" cap="none" normalizeH="0" baseline="0">
+                <a:ln>
+                  <a:noFill/>
+                </a:ln>
+                <a:solidFill>
+                  <a:schemeClr val="tx1"/>
+                </a:solidFill>
+                <a:effectLst/>
+                <a:latin typeface="Aptos" panose="020B0004020202020204" pitchFamily="34" charset="0"/>
+                <a:ea typeface="DengXian" panose="02010600030101010101" pitchFamily="2" charset="-122"/>
+                <a:cs typeface="Times New Roman" panose="02020603050405020304" pitchFamily="18" charset="0"/>
+              </a:rPr>
+              <a:t>8. EMI and RFI filtering as close as possible to exit and entry points in shielded areas </a:t>
+            </a:r>
+            <a:endParaRPr kumimoji="0" lang="en-US" altLang="en-US" sz="400" b="0" i="0" u="none" strike="noStrike" cap="none" normalizeH="0" baseline="0">
+              <a:ln>
+                <a:noFill/>
+              </a:ln>
+              <a:solidFill>
+                <a:schemeClr val="tx1"/>
+              </a:solidFill>
+              <a:effectLst/>
+            </a:endParaRPr>
+          </a:p>
+          <a:p>
+            <a:pPr marL="0" marR="0" lvl="0" indent="0" algn="l" defTabSz="914400" rtl="0" eaLnBrk="0" fontAlgn="base" latinLnBrk="0" hangingPunct="0">
+              <a:lnSpc>
+                <a:spcPct val="100000"/>
+              </a:lnSpc>
+              <a:spcBef>
+                <a:spcPct val="0"/>
+              </a:spcBef>
+              <a:spcAft>
+                <a:spcPct val="0"/>
+              </a:spcAft>
+              <a:buClrTx/>
+              <a:buSzTx/>
+              <a:buFontTx/>
+              <a:buNone/>
+              <a:tabLst/>
+            </a:pPr>
+            <a:endParaRPr kumimoji="0" lang="en-US" altLang="en-US" sz="1800" b="0" i="0" u="none" strike="noStrike" cap="none" normalizeH="0" baseline="0">
+              <a:ln>
+                <a:noFill/>
+              </a:ln>
+              <a:solidFill>
+                <a:schemeClr val="tx1"/>
+              </a:solidFill>
+              <a:effectLst/>
+              <a:latin typeface="Arial" panose="020B0604020202020204" pitchFamily="34" charset="0"/>
+            </a:endParaRPr>
+          </a:p>
+        </p:txBody>
+      </p:sp>
+      <p:sp>
+        <p:nvSpPr>
+          <p:cNvPr id="69" name="Rectangle 66">
+            <a:extLst>
+              <a:ext uri="{FF2B5EF4-FFF2-40B4-BE49-F238E27FC236}">
+                <a16:creationId xmlns:a16="http://schemas.microsoft.com/office/drawing/2014/main" id="{8CCF63C6-0F6D-A4FB-EADF-C4AC68A35455}"/>
+              </a:ext>
+            </a:extLst>
+          </p:cNvPr>
+          <p:cNvSpPr>
+            <a:spLocks noChangeArrowheads="1"/>
+          </p:cNvSpPr>
+          <p:nvPr/>
+        </p:nvSpPr>
+        <p:spPr bwMode="auto">
+          <a:xfrm>
+            <a:off x="609600" y="609600"/>
+            <a:ext cx="6858000" cy="0"/>
+          </a:xfrm>
+          <a:prstGeom prst="rect">
+            <a:avLst/>
+          </a:prstGeom>
+          <a:noFill/>
+          <a:ln>
+            <a:noFill/>
+          </a:ln>
+          <a:effectLst/>
+          <a:extLst>
+            <a:ext uri="{909E8E84-426E-40DD-AFC4-6F175D3DCCD1}">
+              <a14:hiddenFill xmlns:a14="http://schemas.microsoft.com/office/drawing/2010/main">
+                <a:solidFill>
+                  <a:schemeClr val="accent1"/>
+                </a:solidFill>
+              </a14:hiddenFill>
+            </a:ext>
+            <a:ext uri="{91240B29-F687-4F45-9708-019B960494DF}">
+              <a14:hiddenLine xmlns:a14="http://schemas.microsoft.com/office/drawing/2010/main" w="9525">
+                <a:solidFill>
+                  <a:schemeClr val="tx1"/>
+                </a:solidFill>
+                <a:miter lim="800000"/>
+                <a:headEnd/>
+                <a:tailEnd/>
+              </a14:hiddenLine>
+            </a:ext>
+            <a:ext uri="{AF507438-7753-43E0-B8FC-AC1667EBCBE1}">
+              <a14:hiddenEffects xmlns:a14="http://schemas.microsoft.com/office/drawing/2010/main">
+                <a:effectLst>
+                  <a:outerShdw dist="35921" dir="2700000" algn="ctr" rotWithShape="0">
+                    <a:schemeClr val="bg2"/>
+                  </a:outerShdw>
+                </a:effectLst>
+              </a14:hiddenEffects>
+            </a:ext>
+          </a:extLst>
+        </p:spPr>
+        <p:txBody>
+          <a:bodyPr vert="horz" wrap="none" lIns="91440" tIns="45720" rIns="91440" bIns="45720" numCol="1" anchor="ctr" anchorCtr="0" compatLnSpc="1">
+            <a:prstTxWarp prst="textNoShape">
+              <a:avLst/>
+            </a:prstTxWarp>
+            <a:spAutoFit/>
+          </a:bodyPr>
+          <a:lstStyle/>
+          <a:p>
+            <a:pPr marL="0" marR="0" lvl="0" indent="0" algn="l" defTabSz="914400" rtl="0" eaLnBrk="0" fontAlgn="base" latinLnBrk="0" hangingPunct="0">
+              <a:lnSpc>
+                <a:spcPct val="100000"/>
+              </a:lnSpc>
+              <a:spcBef>
+                <a:spcPct val="0"/>
+              </a:spcBef>
+              <a:spcAft>
+                <a:spcPct val="0"/>
+              </a:spcAft>
+              <a:buClrTx/>
+              <a:buSzTx/>
+              <a:buFontTx/>
+              <a:buNone/>
+              <a:tabLst/>
+            </a:pPr>
+            <a:r>
+              <a:rPr kumimoji="0" lang="en-US" altLang="en-US" sz="1100" b="0" i="0" u="none" strike="noStrike" cap="none" normalizeH="0" baseline="0">
+                <a:ln>
+                  <a:noFill/>
+                </a:ln>
+                <a:solidFill>
+                  <a:schemeClr val="tx1"/>
+                </a:solidFill>
+                <a:effectLst/>
+                <a:latin typeface="Aptos" panose="020B0004020202020204" pitchFamily="34" charset="0"/>
+                <a:ea typeface="DengXian" panose="02010600030101010101" pitchFamily="2" charset="-122"/>
+                <a:cs typeface="Times New Roman" panose="02020603050405020304" pitchFamily="18" charset="0"/>
+              </a:rPr>
+              <a:t>9. Mounting holes electrically isolated or not ☑ </a:t>
+            </a:r>
+            <a:endParaRPr kumimoji="0" lang="en-US" altLang="en-US" sz="400" b="0" i="0" u="none" strike="noStrike" cap="none" normalizeH="0" baseline="0">
+              <a:ln>
+                <a:noFill/>
+              </a:ln>
+              <a:solidFill>
+                <a:schemeClr val="tx1"/>
+              </a:solidFill>
+              <a:effectLst/>
+            </a:endParaRPr>
+          </a:p>
+          <a:p>
+            <a:pPr marL="0" marR="0" lvl="0" indent="0" algn="l" defTabSz="914400" rtl="0" eaLnBrk="0" fontAlgn="base" latinLnBrk="0" hangingPunct="0">
+              <a:lnSpc>
+                <a:spcPct val="100000"/>
+              </a:lnSpc>
+              <a:spcBef>
+                <a:spcPct val="0"/>
+              </a:spcBef>
+              <a:spcAft>
+                <a:spcPct val="0"/>
+              </a:spcAft>
+              <a:buClrTx/>
+              <a:buSzTx/>
+              <a:buFontTx/>
+              <a:buNone/>
+              <a:tabLst/>
+            </a:pPr>
+            <a:r>
+              <a:rPr kumimoji="0" lang="en-US" altLang="en-US" sz="1100" b="0" i="0" u="none" strike="noStrike" cap="none" normalizeH="0" baseline="0">
+                <a:ln>
+                  <a:noFill/>
+                </a:ln>
+                <a:solidFill>
+                  <a:schemeClr val="tx1"/>
+                </a:solidFill>
+                <a:effectLst/>
+                <a:latin typeface="Aptos" panose="020B0004020202020204" pitchFamily="34" charset="0"/>
+                <a:ea typeface="DengXian" panose="02010600030101010101" pitchFamily="2" charset="-122"/>
+                <a:cs typeface="Times New Roman" panose="02020603050405020304" pitchFamily="18" charset="0"/>
+              </a:rPr>
+              <a:t>10. Proper mounting hole clearance for hardware ✓ </a:t>
+            </a:r>
+            <a:endParaRPr kumimoji="0" lang="en-US" altLang="en-US" sz="400" b="0" i="0" u="none" strike="noStrike" cap="none" normalizeH="0" baseline="0">
+              <a:ln>
+                <a:noFill/>
+              </a:ln>
+              <a:solidFill>
+                <a:schemeClr val="tx1"/>
+              </a:solidFill>
+              <a:effectLst/>
+            </a:endParaRPr>
+          </a:p>
+          <a:p>
+            <a:pPr marL="0" marR="0" lvl="0" indent="0" algn="l" defTabSz="914400" rtl="0" eaLnBrk="0" fontAlgn="base" latinLnBrk="0" hangingPunct="0">
+              <a:lnSpc>
+                <a:spcPct val="100000"/>
+              </a:lnSpc>
+              <a:spcBef>
+                <a:spcPct val="0"/>
+              </a:spcBef>
+              <a:spcAft>
+                <a:spcPct val="0"/>
+              </a:spcAft>
+              <a:buClrTx/>
+              <a:buSzTx/>
+              <a:buFontTx/>
+              <a:buNone/>
+              <a:tabLst/>
+            </a:pPr>
+            <a:r>
+              <a:rPr kumimoji="0" lang="en-US" altLang="en-US" sz="1100" b="0" i="0" u="none" strike="noStrike" cap="none" normalizeH="0" baseline="0">
+                <a:ln>
+                  <a:noFill/>
+                </a:ln>
+                <a:solidFill>
+                  <a:schemeClr val="tx1"/>
+                </a:solidFill>
+                <a:effectLst/>
+                <a:latin typeface="Aptos" panose="020B0004020202020204" pitchFamily="34" charset="0"/>
+                <a:ea typeface="DengXian" panose="02010600030101010101" pitchFamily="2" charset="-122"/>
+                <a:cs typeface="Times New Roman" panose="02020603050405020304" pitchFamily="18" charset="0"/>
+              </a:rPr>
+              <a:t>11. SMD pad shapes checked NAN/A </a:t>
+            </a:r>
+            <a:endParaRPr kumimoji="0" lang="en-US" altLang="en-US" sz="400" b="0" i="0" u="none" strike="noStrike" cap="none" normalizeH="0" baseline="0">
+              <a:ln>
+                <a:noFill/>
+              </a:ln>
+              <a:solidFill>
+                <a:schemeClr val="tx1"/>
+              </a:solidFill>
+              <a:effectLst/>
+            </a:endParaRPr>
+          </a:p>
+          <a:p>
+            <a:pPr marL="0" marR="0" lvl="0" indent="0" algn="l" defTabSz="914400" rtl="0" eaLnBrk="0" fontAlgn="base" latinLnBrk="0" hangingPunct="0">
+              <a:lnSpc>
+                <a:spcPct val="100000"/>
+              </a:lnSpc>
+              <a:spcBef>
+                <a:spcPct val="0"/>
+              </a:spcBef>
+              <a:spcAft>
+                <a:spcPct val="0"/>
+              </a:spcAft>
+              <a:buClrTx/>
+              <a:buSzTx/>
+              <a:buFontTx/>
+              <a:buNone/>
+              <a:tabLst/>
+            </a:pPr>
+            <a:r>
+              <a:rPr kumimoji="0" lang="en-US" altLang="en-US" sz="1100" b="0" i="0" u="none" strike="noStrike" cap="none" normalizeH="0" baseline="0">
+                <a:ln>
+                  <a:noFill/>
+                </a:ln>
+                <a:solidFill>
+                  <a:schemeClr val="tx1"/>
+                </a:solidFill>
+                <a:effectLst/>
+                <a:latin typeface="Aptos" panose="020B0004020202020204" pitchFamily="34" charset="0"/>
+                <a:ea typeface="DengXian" panose="02010600030101010101" pitchFamily="2" charset="-122"/>
+                <a:cs typeface="Times New Roman" panose="02020603050405020304" pitchFamily="18" charset="0"/>
+              </a:rPr>
+              <a:t>12. Sufficient clearance for socketed ICs </a:t>
+            </a:r>
+            <a:endParaRPr kumimoji="0" lang="en-US" altLang="en-US" sz="400" b="0" i="0" u="none" strike="noStrike" cap="none" normalizeH="0" baseline="0">
+              <a:ln>
+                <a:noFill/>
+              </a:ln>
+              <a:solidFill>
+                <a:schemeClr val="tx1"/>
+              </a:solidFill>
+              <a:effectLst/>
+            </a:endParaRPr>
+          </a:p>
+          <a:p>
+            <a:pPr marL="0" marR="0" lvl="0" indent="0" algn="l" defTabSz="914400" rtl="0" eaLnBrk="0" fontAlgn="base" latinLnBrk="0" hangingPunct="0">
+              <a:lnSpc>
+                <a:spcPct val="100000"/>
+              </a:lnSpc>
+              <a:spcBef>
+                <a:spcPct val="0"/>
+              </a:spcBef>
+              <a:spcAft>
+                <a:spcPct val="0"/>
+              </a:spcAft>
+              <a:buClrTx/>
+              <a:buSzTx/>
+              <a:buFontTx/>
+              <a:buNone/>
+              <a:tabLst/>
+            </a:pPr>
+            <a:r>
+              <a:rPr kumimoji="0" lang="en-US" altLang="en-US" sz="1100" b="0" i="0" u="none" strike="noStrike" cap="none" normalizeH="0" baseline="0">
+                <a:ln>
+                  <a:noFill/>
+                </a:ln>
+                <a:solidFill>
+                  <a:schemeClr val="tx1"/>
+                </a:solidFill>
+                <a:effectLst/>
+                <a:latin typeface="Aptos" panose="020B0004020202020204" pitchFamily="34" charset="0"/>
+                <a:ea typeface="DengXian" panose="02010600030101010101" pitchFamily="2" charset="-122"/>
+                <a:cs typeface="Times New Roman" panose="02020603050405020304" pitchFamily="18" charset="0"/>
+              </a:rPr>
+              <a:t>13. SMD component orientation consistent Routing </a:t>
+            </a:r>
+            <a:endParaRPr kumimoji="0" lang="en-US" altLang="en-US" sz="400" b="0" i="0" u="none" strike="noStrike" cap="none" normalizeH="0" baseline="0">
+              <a:ln>
+                <a:noFill/>
+              </a:ln>
+              <a:solidFill>
+                <a:schemeClr val="tx1"/>
+              </a:solidFill>
+              <a:effectLst/>
+            </a:endParaRPr>
+          </a:p>
+          <a:p>
+            <a:pPr marL="0" marR="0" lvl="0" indent="0" algn="l" defTabSz="914400" rtl="0" eaLnBrk="0" fontAlgn="base" latinLnBrk="0" hangingPunct="0">
+              <a:lnSpc>
+                <a:spcPct val="100000"/>
+              </a:lnSpc>
+              <a:spcBef>
+                <a:spcPct val="0"/>
+              </a:spcBef>
+              <a:spcAft>
+                <a:spcPct val="0"/>
+              </a:spcAft>
+              <a:buClrTx/>
+              <a:buSzTx/>
+              <a:buFontTx/>
+              <a:buNone/>
+              <a:tabLst/>
+            </a:pPr>
+            <a:r>
+              <a:rPr kumimoji="0" lang="en-US" altLang="en-US" sz="1100" b="0" i="0" u="none" strike="noStrike" cap="none" normalizeH="0" baseline="0">
+                <a:ln>
+                  <a:noFill/>
+                </a:ln>
+                <a:solidFill>
+                  <a:schemeClr val="tx1"/>
+                </a:solidFill>
+                <a:effectLst/>
+                <a:latin typeface="Aptos" panose="020B0004020202020204" pitchFamily="34" charset="0"/>
+                <a:ea typeface="DengXian" panose="02010600030101010101" pitchFamily="2" charset="-122"/>
+                <a:cs typeface="Times New Roman" panose="02020603050405020304" pitchFamily="18" charset="0"/>
+              </a:rPr>
+              <a:t>14. Footprints verified against manufacturer datasheet (new parts) 8/16 MA </a:t>
+            </a:r>
+            <a:endParaRPr kumimoji="0" lang="en-US" altLang="en-US" sz="400" b="0" i="0" u="none" strike="noStrike" cap="none" normalizeH="0" baseline="0">
+              <a:ln>
+                <a:noFill/>
+              </a:ln>
+              <a:solidFill>
+                <a:schemeClr val="tx1"/>
+              </a:solidFill>
+              <a:effectLst/>
+            </a:endParaRPr>
+          </a:p>
+          <a:p>
+            <a:pPr marL="0" marR="0" lvl="0" indent="0" algn="l" defTabSz="914400" rtl="0" eaLnBrk="0" fontAlgn="base" latinLnBrk="0" hangingPunct="0">
+              <a:lnSpc>
+                <a:spcPct val="100000"/>
+              </a:lnSpc>
+              <a:spcBef>
+                <a:spcPct val="0"/>
+              </a:spcBef>
+              <a:spcAft>
+                <a:spcPct val="0"/>
+              </a:spcAft>
+              <a:buClrTx/>
+              <a:buSzTx/>
+              <a:buFontTx/>
+              <a:buNone/>
+              <a:tabLst/>
+            </a:pPr>
+            <a:r>
+              <a:rPr kumimoji="0" lang="en-US" altLang="en-US" sz="1100" b="0" i="0" u="none" strike="noStrike" cap="none" normalizeH="0" baseline="0">
+                <a:ln>
+                  <a:noFill/>
+                </a:ln>
+                <a:solidFill>
+                  <a:schemeClr val="tx1"/>
+                </a:solidFill>
+                <a:effectLst/>
+                <a:latin typeface="Aptos" panose="020B0004020202020204" pitchFamily="34" charset="0"/>
+                <a:ea typeface="DengXian" panose="02010600030101010101" pitchFamily="2" charset="-122"/>
+                <a:cs typeface="Times New Roman" panose="02020603050405020304" pitchFamily="18" charset="0"/>
+              </a:rPr>
+              <a:t>15. Check for traces running under noisy or sensitive components ✓✓ </a:t>
+            </a:r>
+            <a:endParaRPr kumimoji="0" lang="en-US" altLang="en-US" sz="400" b="0" i="0" u="none" strike="noStrike" cap="none" normalizeH="0" baseline="0">
+              <a:ln>
+                <a:noFill/>
+              </a:ln>
+              <a:solidFill>
+                <a:schemeClr val="tx1"/>
+              </a:solidFill>
+              <a:effectLst/>
+            </a:endParaRPr>
+          </a:p>
+          <a:p>
+            <a:pPr marL="0" marR="0" lvl="0" indent="0" algn="l" defTabSz="914400" rtl="0" eaLnBrk="0" fontAlgn="base" latinLnBrk="0" hangingPunct="0">
+              <a:lnSpc>
+                <a:spcPct val="100000"/>
+              </a:lnSpc>
+              <a:spcBef>
+                <a:spcPct val="0"/>
+              </a:spcBef>
+              <a:spcAft>
+                <a:spcPct val="0"/>
+              </a:spcAft>
+              <a:buClrTx/>
+              <a:buSzTx/>
+              <a:buFontTx/>
+              <a:buNone/>
+              <a:tabLst/>
+            </a:pPr>
+            <a:endParaRPr kumimoji="0" lang="en-US" altLang="en-US" sz="1800" b="0" i="0" u="none" strike="noStrike" cap="none" normalizeH="0" baseline="0">
+              <a:ln>
+                <a:noFill/>
+              </a:ln>
+              <a:solidFill>
+                <a:schemeClr val="tx1"/>
+              </a:solidFill>
+              <a:effectLst/>
+              <a:latin typeface="Arial" panose="020B0604020202020204" pitchFamily="34" charset="0"/>
+            </a:endParaRPr>
+          </a:p>
+        </p:txBody>
+      </p:sp>
+      <p:sp>
+        <p:nvSpPr>
+          <p:cNvPr id="70" name="Rectangle 67">
+            <a:extLst>
+              <a:ext uri="{FF2B5EF4-FFF2-40B4-BE49-F238E27FC236}">
+                <a16:creationId xmlns:a16="http://schemas.microsoft.com/office/drawing/2014/main" id="{D8330025-BFB0-A316-4757-32BAA18B4CA3}"/>
+              </a:ext>
+            </a:extLst>
+          </p:cNvPr>
+          <p:cNvSpPr>
+            <a:spLocks noChangeArrowheads="1"/>
+          </p:cNvSpPr>
+          <p:nvPr/>
+        </p:nvSpPr>
+        <p:spPr bwMode="auto">
+          <a:xfrm>
+            <a:off x="609600" y="609600"/>
+            <a:ext cx="6858000" cy="0"/>
+          </a:xfrm>
+          <a:prstGeom prst="rect">
+            <a:avLst/>
+          </a:prstGeom>
+          <a:noFill/>
+          <a:ln>
+            <a:noFill/>
+          </a:ln>
+          <a:effectLst/>
+          <a:extLst>
+            <a:ext uri="{909E8E84-426E-40DD-AFC4-6F175D3DCCD1}">
+              <a14:hiddenFill xmlns:a14="http://schemas.microsoft.com/office/drawing/2010/main">
+                <a:solidFill>
+                  <a:schemeClr val="accent1"/>
+                </a:solidFill>
+              </a14:hiddenFill>
+            </a:ext>
+            <a:ext uri="{91240B29-F687-4F45-9708-019B960494DF}">
+              <a14:hiddenLine xmlns:a14="http://schemas.microsoft.com/office/drawing/2010/main" w="9525">
+                <a:solidFill>
+                  <a:schemeClr val="tx1"/>
+                </a:solidFill>
+                <a:miter lim="800000"/>
+                <a:headEnd/>
+                <a:tailEnd/>
+              </a14:hiddenLine>
+            </a:ext>
+            <a:ext uri="{AF507438-7753-43E0-B8FC-AC1667EBCBE1}">
+              <a14:hiddenEffects xmlns:a14="http://schemas.microsoft.com/office/drawing/2010/main">
+                <a:effectLst>
+                  <a:outerShdw dist="35921" dir="2700000" algn="ctr" rotWithShape="0">
+                    <a:schemeClr val="bg2"/>
+                  </a:outerShdw>
+                </a:effectLst>
+              </a14:hiddenEffects>
+            </a:ext>
+          </a:extLst>
+        </p:spPr>
+        <p:txBody>
+          <a:bodyPr vert="horz" wrap="none" lIns="91440" tIns="45720" rIns="91440" bIns="45720" numCol="1" anchor="ctr" anchorCtr="0" compatLnSpc="1">
+            <a:prstTxWarp prst="textNoShape">
+              <a:avLst/>
+            </a:prstTxWarp>
+            <a:spAutoFit/>
+          </a:bodyPr>
+          <a:lstStyle/>
+          <a:p>
+            <a:pPr marL="0" marR="0" lvl="0" indent="0" algn="l" defTabSz="914400" rtl="0" eaLnBrk="0" fontAlgn="base" latinLnBrk="0" hangingPunct="0">
+              <a:lnSpc>
+                <a:spcPct val="100000"/>
+              </a:lnSpc>
+              <a:spcBef>
+                <a:spcPct val="0"/>
+              </a:spcBef>
+              <a:spcAft>
+                <a:spcPct val="0"/>
+              </a:spcAft>
+              <a:buClrTx/>
+              <a:buSzTx/>
+              <a:buFontTx/>
+              <a:buNone/>
+              <a:tabLst/>
+            </a:pPr>
+            <a:r>
+              <a:rPr kumimoji="0" lang="en-US" altLang="en-US" sz="1100" b="0" i="0" u="none" strike="noStrike" cap="none" normalizeH="0" baseline="0">
+                <a:ln>
+                  <a:noFill/>
+                </a:ln>
+                <a:solidFill>
+                  <a:schemeClr val="tx1"/>
+                </a:solidFill>
+                <a:effectLst/>
+                <a:latin typeface="Aptos" panose="020B0004020202020204" pitchFamily="34" charset="0"/>
+                <a:ea typeface="DengXian" panose="02010600030101010101" pitchFamily="2" charset="-122"/>
+                <a:cs typeface="Times New Roman" panose="02020603050405020304" pitchFamily="18" charset="0"/>
+              </a:rPr>
+              <a:t>16.Provide multiple vias for high current and/or low impedance traces 4/9 </a:t>
+            </a:r>
+            <a:endParaRPr kumimoji="0" lang="en-US" altLang="en-US" sz="1800" b="0" i="0" u="none" strike="noStrike" cap="none" normalizeH="0" baseline="0">
+              <a:ln>
+                <a:noFill/>
+              </a:ln>
+              <a:solidFill>
+                <a:schemeClr val="tx1"/>
+              </a:solidFill>
+              <a:effectLst/>
+              <a:latin typeface="Arial" panose="020B0604020202020204" pitchFamily="34" charset="0"/>
+            </a:endParaRPr>
+          </a:p>
+        </p:txBody>
+      </p:sp>
+    </p:spTree>
+    <p:extLst>
+      <p:ext uri="{BB962C8B-B14F-4D97-AF65-F5344CB8AC3E}">
+        <p14:creationId xmlns:p14="http://schemas.microsoft.com/office/powerpoint/2010/main" val="1409877459"/>
+      </p:ext>
+    </p:extLst>
+  </p:cSld>
+  <p:clrMapOvr>
+    <a:masterClrMapping/>
+  </p:clrMapOvr>
+</p:sld>
+</file>
+
 <file path=ppt/theme/theme1.xml><?xml version="1.0" encoding="utf-8"?>
 <a:theme xmlns:a="http://schemas.openxmlformats.org/drawingml/2006/main" name="Office Theme">
   <a:themeElements>
